--- a/docs/design/dist/d07-type-mapping.pptx
+++ b/docs/design/dist/d07-type-mapping.pptx
@@ -3104,8 +3104,8 @@
         </p:nvSpPr>
         <p:spPr>
           <a:xfrm>
-            <a:off x="381000" y="289560"/>
-            <a:ext cx="53340" cy="335280"/>
+            <a:off x="381000" y="274320"/>
+            <a:ext cx="53340" cy="548640"/>
           </a:xfrm>
           <a:prstGeom prst="roundRect">
             <a:avLst>
@@ -3113,7 +3113,7 @@
             </a:avLst>
           </a:prstGeom>
           <a:solidFill>
-            <a:srgbClr val="164B8C"/>
+            <a:srgbClr val="1F4E8C"/>
           </a:solidFill>
           <a:ln>
             <a:noFill/>
@@ -3135,8 +3135,8 @@
         </p:nvSpPr>
         <p:spPr>
           <a:xfrm>
-            <a:off x="533400" y="289560"/>
-            <a:ext cx="7620000" cy="304800"/>
+            <a:off x="533400" y="228600"/>
+            <a:ext cx="8001000" cy="365760"/>
           </a:xfrm>
           <a:prstGeom prst="rect">
             <a:avLst/>
@@ -3151,9 +3151,9 @@
           <a:p>
             <a:pPr algn="l"/>
             <a:r>
-              <a:rPr sz="1800" b="1">
-                <a:solidFill>
-                  <a:srgbClr val="0A2342"/>
+              <a:rPr sz="2160" b="1">
+                <a:solidFill>
+                  <a:srgbClr val="0B2545"/>
                 </a:solidFill>
                 <a:latin typeface="Pretendard"/>
                 <a:ea typeface="Pretendard"/>
@@ -3172,8 +3172,8 @@
         </p:nvSpPr>
         <p:spPr>
           <a:xfrm>
-            <a:off x="533400" y="624840"/>
-            <a:ext cx="7620000" cy="167640"/>
+            <a:off x="533400" y="640080"/>
+            <a:ext cx="9144000" cy="182880"/>
           </a:xfrm>
           <a:prstGeom prst="rect">
             <a:avLst/>
@@ -3188,7 +3188,7 @@
           <a:p>
             <a:pPr algn="l"/>
             <a:r>
-              <a:rPr sz="960" b="0">
+              <a:rPr sz="1080" b="0">
                 <a:solidFill>
                   <a:srgbClr val="3F4E61"/>
                 </a:solidFill>
@@ -3209,8 +3209,8 @@
         </p:nvSpPr>
         <p:spPr>
           <a:xfrm>
-            <a:off x="8763000" y="426720"/>
-            <a:ext cx="3048000" cy="152400"/>
+            <a:off x="8382000" y="411480"/>
+            <a:ext cx="3429000" cy="167640"/>
           </a:xfrm>
           <a:prstGeom prst="rect">
             <a:avLst/>
@@ -3225,7 +3225,7 @@
           <a:p>
             <a:pPr algn="r"/>
             <a:r>
-              <a:rPr sz="840" b="0">
+              <a:rPr sz="1019" b="0">
                 <a:solidFill>
                   <a:srgbClr val="3F4E61"/>
                 </a:solidFill>
@@ -3233,7 +3233,7 @@
                 <a:ea typeface="Pretendard"/>
                 <a:cs typeface="Pretendard"/>
               </a:rPr>
-              <a:t>KDMS-D07 · v0.1 · 2026-10-06</a:t>
+              <a:t>KDMS-D07 · v0.2 · 2026-10-09</a:t>
             </a:r>
           </a:p>
         </p:txBody>
@@ -3246,20 +3246,20 @@
         </p:nvSpPr>
         <p:spPr>
           <a:xfrm>
-            <a:off x="381000" y="914400"/>
-            <a:ext cx="7391400" cy="5059680"/>
+            <a:off x="381000" y="960120"/>
+            <a:ext cx="7391400" cy="5013960"/>
           </a:xfrm>
           <a:prstGeom prst="roundRect">
             <a:avLst>
-              <a:gd name="adj" fmla="val 2710"/>
+              <a:gd name="adj" fmla="val 2735"/>
             </a:avLst>
           </a:prstGeom>
           <a:solidFill>
-            <a:srgbClr val="F1F6FC"/>
+            <a:srgbClr val="EEF6FD"/>
           </a:solidFill>
           <a:ln w="10668">
             <a:solidFill>
-              <a:srgbClr val="A9C3E2"/>
+              <a:srgbClr val="8EC3EC"/>
             </a:solidFill>
           </a:ln>
         </p:spPr>
@@ -3277,7 +3277,7 @@
             <a:r>
               <a:rPr sz="1200" b="1">
                 <a:solidFill>
-                  <a:srgbClr val="0A2342"/>
+                  <a:srgbClr val="0B2545"/>
                 </a:solidFill>
                 <a:latin typeface="Pretendard"/>
                 <a:ea typeface="Pretendard"/>
@@ -3289,11 +3289,11 @@
           <a:p>
             <a:pPr algn="l">
               <a:lnSpc>
-                <a:spcPts val="1200"/>
+                <a:spcPts val="1320"/>
               </a:lnSpc>
             </a:pPr>
             <a:r>
-              <a:rPr sz="869" b="0">
+              <a:rPr sz="1019" b="0">
                 <a:solidFill>
                   <a:srgbClr val="3F4E61"/>
                 </a:solidFill>
@@ -3314,20 +3314,20 @@
         </p:nvSpPr>
         <p:spPr>
           <a:xfrm>
-            <a:off x="7924800" y="914400"/>
-            <a:ext cx="3886200" cy="2590800"/>
+            <a:off x="7924800" y="960120"/>
+            <a:ext cx="3886200" cy="2545080"/>
           </a:xfrm>
           <a:prstGeom prst="roundRect">
             <a:avLst>
-              <a:gd name="adj" fmla="val 5294"/>
+              <a:gd name="adj" fmla="val 5389"/>
             </a:avLst>
           </a:prstGeom>
           <a:solidFill>
-            <a:srgbClr val="F1F6FC"/>
+            <a:srgbClr val="EEF6FD"/>
           </a:solidFill>
           <a:ln w="10668">
             <a:solidFill>
-              <a:srgbClr val="A9C3E2"/>
+              <a:srgbClr val="8EC3EC"/>
             </a:solidFill>
           </a:ln>
         </p:spPr>
@@ -3345,7 +3345,7 @@
             <a:r>
               <a:rPr sz="1200" b="1">
                 <a:solidFill>
-                  <a:srgbClr val="0A2342"/>
+                  <a:srgbClr val="0B2545"/>
                 </a:solidFill>
                 <a:latin typeface="Pretendard"/>
                 <a:ea typeface="Pretendard"/>
@@ -3357,11 +3357,11 @@
           <a:p>
             <a:pPr algn="l">
               <a:lnSpc>
-                <a:spcPts val="1200"/>
+                <a:spcPts val="1320"/>
               </a:lnSpc>
             </a:pPr>
             <a:r>
-              <a:rPr sz="869" b="0">
+              <a:rPr sz="1019" b="0">
                 <a:solidFill>
                   <a:srgbClr val="3F4E61"/>
                 </a:solidFill>
@@ -3391,11 +3391,11 @@
             </a:avLst>
           </a:prstGeom>
           <a:solidFill>
-            <a:srgbClr val="F1F6FC"/>
+            <a:srgbClr val="EEF6FD"/>
           </a:solidFill>
           <a:ln w="10668">
             <a:solidFill>
-              <a:srgbClr val="A9C3E2"/>
+              <a:srgbClr val="8EC3EC"/>
             </a:solidFill>
           </a:ln>
         </p:spPr>
@@ -3413,7 +3413,7 @@
             <a:r>
               <a:rPr sz="1200" b="1">
                 <a:solidFill>
-                  <a:srgbClr val="0A2342"/>
+                  <a:srgbClr val="0B2545"/>
                 </a:solidFill>
                 <a:latin typeface="Pretendard"/>
                 <a:ea typeface="Pretendard"/>
@@ -3425,11 +3425,11 @@
           <a:p>
             <a:pPr algn="l">
               <a:lnSpc>
-                <a:spcPts val="1200"/>
+                <a:spcPts val="1320"/>
               </a:lnSpc>
             </a:pPr>
             <a:r>
-              <a:rPr sz="869" b="0">
+              <a:rPr sz="1019" b="0">
                 <a:solidFill>
                   <a:srgbClr val="3F4E61"/>
                 </a:solidFill>
@@ -3450,8 +3450,8 @@
         </p:nvSpPr>
         <p:spPr>
           <a:xfrm>
-            <a:off x="548640" y="1493520"/>
-            <a:ext cx="1463040" cy="624840"/>
+            <a:off x="548640" y="1554480"/>
+            <a:ext cx="1493520" cy="624840"/>
           </a:xfrm>
           <a:prstGeom prst="roundRect">
             <a:avLst>
@@ -3461,27 +3461,27 @@
           <a:solidFill>
             <a:srgbClr val="FFFFFF"/>
           </a:solidFill>
-          <a:ln w="12192">
+          <a:ln w="13716">
             <a:solidFill>
-              <a:srgbClr val="6F9BD1"/>
+              <a:srgbClr val="8EC3EC"/>
             </a:solidFill>
           </a:ln>
         </p:spPr>
         <p:txBody>
-          <a:bodyPr rtlCol="0" anchor="t" lIns="45720" tIns="118110" rIns="45720" bIns="0" wrap="none">
+          <a:bodyPr rtlCol="0" anchor="t" lIns="45720" tIns="99060" rIns="45720" bIns="0" wrap="none">
             <a:noAutofit/>
           </a:bodyPr>
           <a:lstStyle/>
           <a:p>
             <a:pPr algn="ctr">
               <a:lnSpc>
-                <a:spcPts val="1439"/>
+                <a:spcPts val="1560"/>
               </a:lnSpc>
             </a:pPr>
             <a:r>
-              <a:rPr sz="1140" b="1">
-                <a:solidFill>
-                  <a:srgbClr val="0A2342"/>
+              <a:rPr sz="1200" b="1">
+                <a:solidFill>
+                  <a:srgbClr val="0B2545"/>
                 </a:solidFill>
                 <a:latin typeface="Pretendard"/>
                 <a:ea typeface="Pretendard"/>
@@ -3493,11 +3493,11 @@
           <a:p>
             <a:pPr algn="ctr">
               <a:lnSpc>
-                <a:spcPts val="1140"/>
+                <a:spcPts val="1320"/>
               </a:lnSpc>
             </a:pPr>
             <a:r>
-              <a:rPr sz="869" b="0">
+              <a:rPr sz="1019" b="0">
                 <a:solidFill>
                   <a:srgbClr val="3F4E61"/>
                 </a:solidFill>
@@ -3518,8 +3518,8 @@
         </p:nvSpPr>
         <p:spPr>
           <a:xfrm>
-            <a:off x="2240280" y="1493520"/>
-            <a:ext cx="1600200" cy="624840"/>
+            <a:off x="2255520" y="1554480"/>
+            <a:ext cx="1706880" cy="624840"/>
           </a:xfrm>
           <a:prstGeom prst="roundRect">
             <a:avLst>
@@ -3529,27 +3529,27 @@
           <a:solidFill>
             <a:srgbClr val="FFFFFF"/>
           </a:solidFill>
-          <a:ln w="12192">
+          <a:ln w="13716">
             <a:solidFill>
-              <a:srgbClr val="6F9BD1"/>
+              <a:srgbClr val="8EC3EC"/>
             </a:solidFill>
           </a:ln>
         </p:spPr>
         <p:txBody>
-          <a:bodyPr rtlCol="0" anchor="t" lIns="45720" tIns="118110" rIns="45720" bIns="0" wrap="none">
+          <a:bodyPr rtlCol="0" anchor="t" lIns="45720" tIns="99060" rIns="45720" bIns="0" wrap="none">
             <a:noAutofit/>
           </a:bodyPr>
           <a:lstStyle/>
           <a:p>
             <a:pPr algn="ctr">
               <a:lnSpc>
-                <a:spcPts val="1439"/>
+                <a:spcPts val="1560"/>
               </a:lnSpc>
             </a:pPr>
             <a:r>
-              <a:rPr sz="1140" b="1">
-                <a:solidFill>
-                  <a:srgbClr val="0A2342"/>
+              <a:rPr sz="1200" b="1">
+                <a:solidFill>
+                  <a:srgbClr val="0B2545"/>
                 </a:solidFill>
                 <a:latin typeface="Pretendard"/>
                 <a:ea typeface="Pretendard"/>
@@ -3561,11 +3561,11 @@
           <a:p>
             <a:pPr algn="ctr">
               <a:lnSpc>
-                <a:spcPts val="1140"/>
+                <a:spcPts val="1320"/>
               </a:lnSpc>
             </a:pPr>
             <a:r>
-              <a:rPr sz="869" b="0">
+              <a:rPr sz="1019" b="0">
                 <a:solidFill>
                   <a:srgbClr val="3F4E61"/>
                 </a:solidFill>
@@ -3586,8 +3586,8 @@
         </p:nvSpPr>
         <p:spPr>
           <a:xfrm>
-            <a:off x="548640" y="2255520"/>
-            <a:ext cx="1463040" cy="624840"/>
+            <a:off x="548640" y="2301240"/>
+            <a:ext cx="1493520" cy="624840"/>
           </a:xfrm>
           <a:prstGeom prst="roundRect">
             <a:avLst>
@@ -3597,27 +3597,27 @@
           <a:solidFill>
             <a:srgbClr val="FFFFFF"/>
           </a:solidFill>
-          <a:ln w="12192">
+          <a:ln w="13716">
             <a:solidFill>
-              <a:srgbClr val="6F9BD1"/>
+              <a:srgbClr val="8EC3EC"/>
             </a:solidFill>
           </a:ln>
         </p:spPr>
         <p:txBody>
-          <a:bodyPr rtlCol="0" anchor="t" lIns="45720" tIns="118110" rIns="45720" bIns="0" wrap="none">
+          <a:bodyPr rtlCol="0" anchor="t" lIns="45720" tIns="99060" rIns="45720" bIns="0" wrap="none">
             <a:noAutofit/>
           </a:bodyPr>
           <a:lstStyle/>
           <a:p>
             <a:pPr algn="ctr">
               <a:lnSpc>
-                <a:spcPts val="1439"/>
+                <a:spcPts val="1560"/>
               </a:lnSpc>
             </a:pPr>
             <a:r>
-              <a:rPr sz="1140" b="1">
-                <a:solidFill>
-                  <a:srgbClr val="0A2342"/>
+              <a:rPr sz="1200" b="1">
+                <a:solidFill>
+                  <a:srgbClr val="0B2545"/>
                 </a:solidFill>
                 <a:latin typeface="Pretendard"/>
                 <a:ea typeface="Pretendard"/>
@@ -3629,11 +3629,11 @@
           <a:p>
             <a:pPr algn="ctr">
               <a:lnSpc>
-                <a:spcPts val="1140"/>
+                <a:spcPts val="1320"/>
               </a:lnSpc>
             </a:pPr>
             <a:r>
-              <a:rPr sz="869" b="0">
+              <a:rPr sz="1019" b="0">
                 <a:solidFill>
                   <a:srgbClr val="3F4E61"/>
                 </a:solidFill>
@@ -3654,8 +3654,8 @@
         </p:nvSpPr>
         <p:spPr>
           <a:xfrm>
-            <a:off x="2240280" y="2255520"/>
-            <a:ext cx="1600200" cy="624840"/>
+            <a:off x="2255520" y="2301240"/>
+            <a:ext cx="1706880" cy="624840"/>
           </a:xfrm>
           <a:prstGeom prst="roundRect">
             <a:avLst>
@@ -3665,27 +3665,27 @@
           <a:solidFill>
             <a:srgbClr val="FFFFFF"/>
           </a:solidFill>
-          <a:ln w="12192">
+          <a:ln w="13716">
             <a:solidFill>
-              <a:srgbClr val="6F9BD1"/>
+              <a:srgbClr val="8EC3EC"/>
             </a:solidFill>
           </a:ln>
         </p:spPr>
         <p:txBody>
-          <a:bodyPr rtlCol="0" anchor="t" lIns="45720" tIns="118110" rIns="45720" bIns="0" wrap="none">
+          <a:bodyPr rtlCol="0" anchor="t" lIns="45720" tIns="99060" rIns="45720" bIns="0" wrap="none">
             <a:noAutofit/>
           </a:bodyPr>
           <a:lstStyle/>
           <a:p>
             <a:pPr algn="ctr">
               <a:lnSpc>
-                <a:spcPts val="1439"/>
+                <a:spcPts val="1560"/>
               </a:lnSpc>
             </a:pPr>
             <a:r>
-              <a:rPr sz="1140" b="1">
-                <a:solidFill>
-                  <a:srgbClr val="0A2342"/>
+              <a:rPr sz="1200" b="1">
+                <a:solidFill>
+                  <a:srgbClr val="0B2545"/>
                 </a:solidFill>
                 <a:latin typeface="Pretendard"/>
                 <a:ea typeface="Pretendard"/>
@@ -3697,11 +3697,11 @@
           <a:p>
             <a:pPr algn="ctr">
               <a:lnSpc>
-                <a:spcPts val="1140"/>
+                <a:spcPts val="1320"/>
               </a:lnSpc>
             </a:pPr>
             <a:r>
-              <a:rPr sz="869" b="0">
+              <a:rPr sz="1019" b="0">
                 <a:solidFill>
                   <a:srgbClr val="3F4E61"/>
                 </a:solidFill>
@@ -3722,8 +3722,8 @@
         </p:nvSpPr>
         <p:spPr>
           <a:xfrm>
-            <a:off x="548640" y="3017520"/>
-            <a:ext cx="1463040" cy="624840"/>
+            <a:off x="548640" y="3048000"/>
+            <a:ext cx="1493520" cy="624840"/>
           </a:xfrm>
           <a:prstGeom prst="roundRect">
             <a:avLst>
@@ -3733,27 +3733,27 @@
           <a:solidFill>
             <a:srgbClr val="FFFFFF"/>
           </a:solidFill>
-          <a:ln w="12192">
+          <a:ln w="13716">
             <a:solidFill>
-              <a:srgbClr val="6F9BD1"/>
+              <a:srgbClr val="8EC3EC"/>
             </a:solidFill>
           </a:ln>
         </p:spPr>
         <p:txBody>
-          <a:bodyPr rtlCol="0" anchor="t" lIns="45720" tIns="118110" rIns="45720" bIns="0" wrap="none">
+          <a:bodyPr rtlCol="0" anchor="t" lIns="45720" tIns="99060" rIns="45720" bIns="0" wrap="none">
             <a:noAutofit/>
           </a:bodyPr>
           <a:lstStyle/>
           <a:p>
             <a:pPr algn="ctr">
               <a:lnSpc>
-                <a:spcPts val="1439"/>
+                <a:spcPts val="1560"/>
               </a:lnSpc>
             </a:pPr>
             <a:r>
-              <a:rPr sz="1140" b="1">
-                <a:solidFill>
-                  <a:srgbClr val="0A2342"/>
+              <a:rPr sz="1200" b="1">
+                <a:solidFill>
+                  <a:srgbClr val="0B2545"/>
                 </a:solidFill>
                 <a:latin typeface="Pretendard"/>
                 <a:ea typeface="Pretendard"/>
@@ -3765,11 +3765,11 @@
           <a:p>
             <a:pPr algn="ctr">
               <a:lnSpc>
-                <a:spcPts val="1140"/>
+                <a:spcPts val="1320"/>
               </a:lnSpc>
             </a:pPr>
             <a:r>
-              <a:rPr sz="869" b="0">
+              <a:rPr sz="1019" b="0">
                 <a:solidFill>
                   <a:srgbClr val="3F4E61"/>
                 </a:solidFill>
@@ -3790,8 +3790,8 @@
         </p:nvSpPr>
         <p:spPr>
           <a:xfrm>
-            <a:off x="2240280" y="3017520"/>
-            <a:ext cx="1600200" cy="624840"/>
+            <a:off x="2255520" y="3048000"/>
+            <a:ext cx="1706880" cy="624840"/>
           </a:xfrm>
           <a:prstGeom prst="roundRect">
             <a:avLst>
@@ -3801,27 +3801,27 @@
           <a:solidFill>
             <a:srgbClr val="FFFFFF"/>
           </a:solidFill>
-          <a:ln w="12192">
+          <a:ln w="13716">
             <a:solidFill>
-              <a:srgbClr val="6F9BD1"/>
+              <a:srgbClr val="8EC3EC"/>
             </a:solidFill>
           </a:ln>
         </p:spPr>
         <p:txBody>
-          <a:bodyPr rtlCol="0" anchor="t" lIns="45720" tIns="118110" rIns="45720" bIns="0" wrap="none">
+          <a:bodyPr rtlCol="0" anchor="t" lIns="45720" tIns="99060" rIns="45720" bIns="0" wrap="none">
             <a:noAutofit/>
           </a:bodyPr>
           <a:lstStyle/>
           <a:p>
             <a:pPr algn="ctr">
               <a:lnSpc>
-                <a:spcPts val="1439"/>
+                <a:spcPts val="1560"/>
               </a:lnSpc>
             </a:pPr>
             <a:r>
-              <a:rPr sz="1140" b="1">
-                <a:solidFill>
-                  <a:srgbClr val="0A2342"/>
+              <a:rPr sz="1200" b="1">
+                <a:solidFill>
+                  <a:srgbClr val="0B2545"/>
                 </a:solidFill>
                 <a:latin typeface="Pretendard"/>
                 <a:ea typeface="Pretendard"/>
@@ -3833,11 +3833,11 @@
           <a:p>
             <a:pPr algn="ctr">
               <a:lnSpc>
-                <a:spcPts val="1140"/>
+                <a:spcPts val="1320"/>
               </a:lnSpc>
             </a:pPr>
             <a:r>
-              <a:rPr sz="869" b="0">
+              <a:rPr sz="1019" b="0">
                 <a:solidFill>
                   <a:srgbClr val="3F4E61"/>
                 </a:solidFill>
@@ -3845,7 +3845,7 @@
                 <a:ea typeface="Pretendard"/>
                 <a:cs typeface="Pretendard"/>
               </a:rPr>
-              <a:t>합계 오버플로 방지 (A04)</a:t>
+              <a:t>합계 넘침 방지 (A04)</a:t>
             </a:r>
           </a:p>
         </p:txBody>
@@ -3858,8 +3858,8 @@
         </p:nvSpPr>
         <p:spPr>
           <a:xfrm>
-            <a:off x="548640" y="3779520"/>
-            <a:ext cx="1463040" cy="624840"/>
+            <a:off x="548640" y="3794760"/>
+            <a:ext cx="1493520" cy="624840"/>
           </a:xfrm>
           <a:prstGeom prst="roundRect">
             <a:avLst>
@@ -3869,27 +3869,27 @@
           <a:solidFill>
             <a:srgbClr val="FFFFFF"/>
           </a:solidFill>
-          <a:ln w="12192">
+          <a:ln w="13716">
             <a:solidFill>
-              <a:srgbClr val="6F9BD1"/>
+              <a:srgbClr val="8EC3EC"/>
             </a:solidFill>
           </a:ln>
         </p:spPr>
         <p:txBody>
-          <a:bodyPr rtlCol="0" anchor="t" lIns="45720" tIns="118110" rIns="45720" bIns="0" wrap="none">
+          <a:bodyPr rtlCol="0" anchor="t" lIns="45720" tIns="99060" rIns="45720" bIns="0" wrap="none">
             <a:noAutofit/>
           </a:bodyPr>
           <a:lstStyle/>
           <a:p>
             <a:pPr algn="ctr">
               <a:lnSpc>
-                <a:spcPts val="1439"/>
+                <a:spcPts val="1560"/>
               </a:lnSpc>
             </a:pPr>
             <a:r>
-              <a:rPr sz="1140" b="1">
-                <a:solidFill>
-                  <a:srgbClr val="0A2342"/>
+              <a:rPr sz="1200" b="1">
+                <a:solidFill>
+                  <a:srgbClr val="0B2545"/>
                 </a:solidFill>
                 <a:latin typeface="Pretendard"/>
                 <a:ea typeface="Pretendard"/>
@@ -3901,11 +3901,11 @@
           <a:p>
             <a:pPr algn="ctr">
               <a:lnSpc>
-                <a:spcPts val="1140"/>
+                <a:spcPts val="1320"/>
               </a:lnSpc>
             </a:pPr>
             <a:r>
-              <a:rPr sz="869" b="0">
+              <a:rPr sz="1019" b="0">
                 <a:solidFill>
                   <a:srgbClr val="3F4E61"/>
                 </a:solidFill>
@@ -3926,8 +3926,8 @@
         </p:nvSpPr>
         <p:spPr>
           <a:xfrm>
-            <a:off x="2240280" y="3779520"/>
-            <a:ext cx="1600200" cy="624840"/>
+            <a:off x="2255520" y="3794760"/>
+            <a:ext cx="1706880" cy="624840"/>
           </a:xfrm>
           <a:prstGeom prst="roundRect">
             <a:avLst>
@@ -3937,27 +3937,27 @@
           <a:solidFill>
             <a:srgbClr val="FFFFFF"/>
           </a:solidFill>
-          <a:ln w="12192">
+          <a:ln w="13716">
             <a:solidFill>
-              <a:srgbClr val="6F9BD1"/>
+              <a:srgbClr val="8EC3EC"/>
             </a:solidFill>
           </a:ln>
         </p:spPr>
         <p:txBody>
-          <a:bodyPr rtlCol="0" anchor="t" lIns="45720" tIns="118110" rIns="45720" bIns="0" wrap="none">
+          <a:bodyPr rtlCol="0" anchor="t" lIns="45720" tIns="99060" rIns="45720" bIns="0" wrap="none">
             <a:noAutofit/>
           </a:bodyPr>
           <a:lstStyle/>
           <a:p>
             <a:pPr algn="ctr">
               <a:lnSpc>
-                <a:spcPts val="1439"/>
+                <a:spcPts val="1560"/>
               </a:lnSpc>
             </a:pPr>
             <a:r>
-              <a:rPr sz="1140" b="1">
-                <a:solidFill>
-                  <a:srgbClr val="0A2342"/>
+              <a:rPr sz="1200" b="1">
+                <a:solidFill>
+                  <a:srgbClr val="0B2545"/>
                 </a:solidFill>
                 <a:latin typeface="Pretendard"/>
                 <a:ea typeface="Pretendard"/>
@@ -3969,11 +3969,11 @@
           <a:p>
             <a:pPr algn="ctr">
               <a:lnSpc>
-                <a:spcPts val="1140"/>
+                <a:spcPts val="1320"/>
               </a:lnSpc>
             </a:pPr>
             <a:r>
-              <a:rPr sz="869" b="0">
+              <a:rPr sz="1019" b="0">
                 <a:solidFill>
                   <a:srgbClr val="3F4E61"/>
                 </a:solidFill>
@@ -3981,7 +3981,7 @@
                 <a:ea typeface="Pretendard"/>
                 <a:cs typeface="Pretendard"/>
               </a:rPr>
-              <a:t>앱 SQL '= 1' 주의 (A07)</a:t>
+              <a:t>앱의 '= 1' 주의 (A07)</a:t>
             </a:r>
           </a:p>
         </p:txBody>
@@ -3995,7 +3995,7 @@
         <p:spPr>
           <a:xfrm>
             <a:off x="548640" y="4541520"/>
-            <a:ext cx="1463040" cy="624840"/>
+            <a:ext cx="1493520" cy="624840"/>
           </a:xfrm>
           <a:prstGeom prst="roundRect">
             <a:avLst>
@@ -4005,27 +4005,27 @@
           <a:solidFill>
             <a:srgbClr val="FFFFFF"/>
           </a:solidFill>
-          <a:ln w="12192">
+          <a:ln w="13716">
             <a:solidFill>
-              <a:srgbClr val="6F9BD1"/>
+              <a:srgbClr val="8EC3EC"/>
             </a:solidFill>
           </a:ln>
         </p:spPr>
         <p:txBody>
-          <a:bodyPr rtlCol="0" anchor="t" lIns="45720" tIns="118110" rIns="45720" bIns="0" wrap="none">
+          <a:bodyPr rtlCol="0" anchor="t" lIns="45720" tIns="99060" rIns="45720" bIns="0" wrap="none">
             <a:noAutofit/>
           </a:bodyPr>
           <a:lstStyle/>
           <a:p>
             <a:pPr algn="ctr">
               <a:lnSpc>
-                <a:spcPts val="1439"/>
+                <a:spcPts val="1560"/>
               </a:lnSpc>
             </a:pPr>
             <a:r>
-              <a:rPr sz="1140" b="1">
-                <a:solidFill>
-                  <a:srgbClr val="0A2342"/>
+              <a:rPr sz="1200" b="1">
+                <a:solidFill>
+                  <a:srgbClr val="0B2545"/>
                 </a:solidFill>
                 <a:latin typeface="Pretendard"/>
                 <a:ea typeface="Pretendard"/>
@@ -4037,11 +4037,11 @@
           <a:p>
             <a:pPr algn="ctr">
               <a:lnSpc>
-                <a:spcPts val="1140"/>
+                <a:spcPts val="1320"/>
               </a:lnSpc>
             </a:pPr>
             <a:r>
-              <a:rPr sz="869" b="0">
+              <a:rPr sz="1019" b="0">
                 <a:solidFill>
                   <a:srgbClr val="3F4E61"/>
                 </a:solidFill>
@@ -4062,8 +4062,8 @@
         </p:nvSpPr>
         <p:spPr>
           <a:xfrm>
-            <a:off x="2240280" y="4541520"/>
-            <a:ext cx="1600200" cy="624840"/>
+            <a:off x="2255520" y="4541520"/>
+            <a:ext cx="1706880" cy="624840"/>
           </a:xfrm>
           <a:prstGeom prst="roundRect">
             <a:avLst>
@@ -4073,27 +4073,27 @@
           <a:solidFill>
             <a:srgbClr val="FFFFFF"/>
           </a:solidFill>
-          <a:ln w="12192">
+          <a:ln w="13716">
             <a:solidFill>
-              <a:srgbClr val="6F9BD1"/>
+              <a:srgbClr val="8EC3EC"/>
             </a:solidFill>
           </a:ln>
         </p:spPr>
         <p:txBody>
-          <a:bodyPr rtlCol="0" anchor="t" lIns="45720" tIns="118110" rIns="45720" bIns="0" wrap="none">
+          <a:bodyPr rtlCol="0" anchor="t" lIns="45720" tIns="99060" rIns="45720" bIns="0" wrap="none">
             <a:noAutofit/>
           </a:bodyPr>
           <a:lstStyle/>
           <a:p>
             <a:pPr algn="ctr">
               <a:lnSpc>
-                <a:spcPts val="1439"/>
+                <a:spcPts val="1560"/>
               </a:lnSpc>
             </a:pPr>
             <a:r>
-              <a:rPr sz="1140" b="1">
-                <a:solidFill>
-                  <a:srgbClr val="0A2342"/>
+              <a:rPr sz="1200" b="1">
+                <a:solidFill>
+                  <a:srgbClr val="0B2545"/>
                 </a:solidFill>
                 <a:latin typeface="Pretendard"/>
                 <a:ea typeface="Pretendard"/>
@@ -4105,11 +4105,11 @@
           <a:p>
             <a:pPr algn="ctr">
               <a:lnSpc>
-                <a:spcPts val="1140"/>
+                <a:spcPts val="1320"/>
               </a:lnSpc>
             </a:pPr>
             <a:r>
-              <a:rPr sz="869" b="0">
+              <a:rPr sz="1019" b="0">
                 <a:solidFill>
                   <a:srgbClr val="3F4E61"/>
                 </a:solidFill>
@@ -4130,8 +4130,8 @@
         </p:nvSpPr>
         <p:spPr>
           <a:xfrm>
-            <a:off x="4191000" y="1493520"/>
-            <a:ext cx="1463040" cy="624840"/>
+            <a:off x="4191000" y="1554480"/>
+            <a:ext cx="1493520" cy="624840"/>
           </a:xfrm>
           <a:prstGeom prst="roundRect">
             <a:avLst>
@@ -4141,27 +4141,27 @@
           <a:solidFill>
             <a:srgbClr val="FFFFFF"/>
           </a:solidFill>
-          <a:ln w="12192">
+          <a:ln w="13716">
             <a:solidFill>
-              <a:srgbClr val="6F9BD1"/>
+              <a:srgbClr val="8EC3EC"/>
             </a:solidFill>
           </a:ln>
         </p:spPr>
         <p:txBody>
-          <a:bodyPr rtlCol="0" anchor="t" lIns="45720" tIns="118110" rIns="45720" bIns="0" wrap="none">
+          <a:bodyPr rtlCol="0" anchor="t" lIns="45720" tIns="99060" rIns="45720" bIns="0" wrap="none">
             <a:noAutofit/>
           </a:bodyPr>
           <a:lstStyle/>
           <a:p>
             <a:pPr algn="ctr">
               <a:lnSpc>
-                <a:spcPts val="1439"/>
+                <a:spcPts val="1560"/>
               </a:lnSpc>
             </a:pPr>
             <a:r>
-              <a:rPr sz="1140" b="1">
-                <a:solidFill>
-                  <a:srgbClr val="0A2342"/>
+              <a:rPr sz="1200" b="1">
+                <a:solidFill>
+                  <a:srgbClr val="0B2545"/>
                 </a:solidFill>
                 <a:latin typeface="Pretendard"/>
                 <a:ea typeface="Pretendard"/>
@@ -4173,11 +4173,11 @@
           <a:p>
             <a:pPr algn="ctr">
               <a:lnSpc>
-                <a:spcPts val="1140"/>
+                <a:spcPts val="1320"/>
               </a:lnSpc>
             </a:pPr>
             <a:r>
-              <a:rPr sz="869" b="0">
+              <a:rPr sz="1019" b="0">
                 <a:solidFill>
                   <a:srgbClr val="3F4E61"/>
                 </a:solidFill>
@@ -4198,8 +4198,8 @@
         </p:nvSpPr>
         <p:spPr>
           <a:xfrm>
-            <a:off x="5882640" y="1493520"/>
-            <a:ext cx="1600200" cy="624840"/>
+            <a:off x="5897880" y="1554480"/>
+            <a:ext cx="1706880" cy="624840"/>
           </a:xfrm>
           <a:prstGeom prst="roundRect">
             <a:avLst>
@@ -4209,27 +4209,27 @@
           <a:solidFill>
             <a:srgbClr val="FFFFFF"/>
           </a:solidFill>
-          <a:ln w="12192">
+          <a:ln w="13716">
             <a:solidFill>
-              <a:srgbClr val="6F9BD1"/>
+              <a:srgbClr val="8EC3EC"/>
             </a:solidFill>
           </a:ln>
         </p:spPr>
         <p:txBody>
-          <a:bodyPr rtlCol="0" anchor="t" lIns="45720" tIns="118110" rIns="45720" bIns="0" wrap="none">
+          <a:bodyPr rtlCol="0" anchor="t" lIns="45720" tIns="99060" rIns="45720" bIns="0" wrap="none">
             <a:noAutofit/>
           </a:bodyPr>
           <a:lstStyle/>
           <a:p>
             <a:pPr algn="ctr">
               <a:lnSpc>
-                <a:spcPts val="1439"/>
+                <a:spcPts val="1560"/>
               </a:lnSpc>
             </a:pPr>
             <a:r>
-              <a:rPr sz="1140" b="1">
-                <a:solidFill>
-                  <a:srgbClr val="0A2342"/>
+              <a:rPr sz="1200" b="1">
+                <a:solidFill>
+                  <a:srgbClr val="0B2545"/>
                 </a:solidFill>
                 <a:latin typeface="Pretendard"/>
                 <a:ea typeface="Pretendard"/>
@@ -4241,11 +4241,11 @@
           <a:p>
             <a:pPr algn="ctr">
               <a:lnSpc>
-                <a:spcPts val="1140"/>
+                <a:spcPts val="1320"/>
               </a:lnSpc>
             </a:pPr>
             <a:r>
-              <a:rPr sz="869" b="0">
+              <a:rPr sz="1019" b="0">
                 <a:solidFill>
                   <a:srgbClr val="3F4E61"/>
                 </a:solidFill>
@@ -4253,7 +4253,7 @@
                 <a:ea typeface="Pretendard"/>
                 <a:cs typeface="Pretendard"/>
               </a:rPr>
-              <a:t>UTF-8 바이트 증가 (A03)</a:t>
+              <a:t>바이트 늘어남 (A03)</a:t>
             </a:r>
           </a:p>
         </p:txBody>
@@ -4266,8 +4266,8 @@
         </p:nvSpPr>
         <p:spPr>
           <a:xfrm>
-            <a:off x="4191000" y="2255520"/>
-            <a:ext cx="1463040" cy="624840"/>
+            <a:off x="4191000" y="2301240"/>
+            <a:ext cx="1493520" cy="624840"/>
           </a:xfrm>
           <a:prstGeom prst="roundRect">
             <a:avLst>
@@ -4277,27 +4277,27 @@
           <a:solidFill>
             <a:srgbClr val="FFFFFF"/>
           </a:solidFill>
-          <a:ln w="12192">
+          <a:ln w="13716">
             <a:solidFill>
-              <a:srgbClr val="6F9BD1"/>
+              <a:srgbClr val="8EC3EC"/>
             </a:solidFill>
           </a:ln>
         </p:spPr>
         <p:txBody>
-          <a:bodyPr rtlCol="0" anchor="t" lIns="45720" tIns="118110" rIns="45720" bIns="0" wrap="none">
+          <a:bodyPr rtlCol="0" anchor="t" lIns="45720" tIns="99060" rIns="45720" bIns="0" wrap="none">
             <a:noAutofit/>
           </a:bodyPr>
           <a:lstStyle/>
           <a:p>
             <a:pPr algn="ctr">
               <a:lnSpc>
-                <a:spcPts val="1439"/>
+                <a:spcPts val="1560"/>
               </a:lnSpc>
             </a:pPr>
             <a:r>
-              <a:rPr sz="1140" b="1">
-                <a:solidFill>
-                  <a:srgbClr val="0A2342"/>
+              <a:rPr sz="1200" b="1">
+                <a:solidFill>
+                  <a:srgbClr val="0B2545"/>
                 </a:solidFill>
                 <a:latin typeface="Pretendard"/>
                 <a:ea typeface="Pretendard"/>
@@ -4309,11 +4309,11 @@
           <a:p>
             <a:pPr algn="ctr">
               <a:lnSpc>
-                <a:spcPts val="1140"/>
+                <a:spcPts val="1320"/>
               </a:lnSpc>
             </a:pPr>
             <a:r>
-              <a:rPr sz="869" b="0">
+              <a:rPr sz="1019" b="0">
                 <a:solidFill>
                   <a:srgbClr val="3F4E61"/>
                 </a:solidFill>
@@ -4334,8 +4334,8 @@
         </p:nvSpPr>
         <p:spPr>
           <a:xfrm>
-            <a:off x="5882640" y="2255520"/>
-            <a:ext cx="1600200" cy="624840"/>
+            <a:off x="5897880" y="2301240"/>
+            <a:ext cx="1706880" cy="624840"/>
           </a:xfrm>
           <a:prstGeom prst="roundRect">
             <a:avLst>
@@ -4345,27 +4345,27 @@
           <a:solidFill>
             <a:srgbClr val="FFFFFF"/>
           </a:solidFill>
-          <a:ln w="12192">
+          <a:ln w="13716">
             <a:solidFill>
-              <a:srgbClr val="6F9BD1"/>
+              <a:srgbClr val="8EC3EC"/>
             </a:solidFill>
           </a:ln>
         </p:spPr>
         <p:txBody>
-          <a:bodyPr rtlCol="0" anchor="t" lIns="45720" tIns="118110" rIns="45720" bIns="0" wrap="none">
+          <a:bodyPr rtlCol="0" anchor="t" lIns="45720" tIns="99060" rIns="45720" bIns="0" wrap="none">
             <a:noAutofit/>
           </a:bodyPr>
           <a:lstStyle/>
           <a:p>
             <a:pPr algn="ctr">
               <a:lnSpc>
-                <a:spcPts val="1439"/>
+                <a:spcPts val="1560"/>
               </a:lnSpc>
             </a:pPr>
             <a:r>
-              <a:rPr sz="1140" b="1">
-                <a:solidFill>
-                  <a:srgbClr val="0A2342"/>
+              <a:rPr sz="1200" b="1">
+                <a:solidFill>
+                  <a:srgbClr val="0B2545"/>
                 </a:solidFill>
                 <a:latin typeface="Pretendard"/>
                 <a:ea typeface="Pretendard"/>
@@ -4377,11 +4377,11 @@
           <a:p>
             <a:pPr algn="ctr">
               <a:lnSpc>
-                <a:spcPts val="1140"/>
+                <a:spcPts val="1320"/>
               </a:lnSpc>
             </a:pPr>
             <a:r>
-              <a:rPr sz="869" b="0">
+              <a:rPr sz="1019" b="0">
                 <a:solidFill>
                   <a:srgbClr val="3F4E61"/>
                 </a:solidFill>
@@ -4402,8 +4402,8 @@
         </p:nvSpPr>
         <p:spPr>
           <a:xfrm>
-            <a:off x="4191000" y="3017520"/>
-            <a:ext cx="1463040" cy="624840"/>
+            <a:off x="4191000" y="3048000"/>
+            <a:ext cx="1493520" cy="624840"/>
           </a:xfrm>
           <a:prstGeom prst="roundRect">
             <a:avLst>
@@ -4413,27 +4413,27 @@
           <a:solidFill>
             <a:srgbClr val="FFFFFF"/>
           </a:solidFill>
-          <a:ln w="12192">
+          <a:ln w="13716">
             <a:solidFill>
-              <a:srgbClr val="6F9BD1"/>
+              <a:srgbClr val="8EC3EC"/>
             </a:solidFill>
           </a:ln>
         </p:spPr>
         <p:txBody>
-          <a:bodyPr rtlCol="0" anchor="t" lIns="45720" tIns="118110" rIns="45720" bIns="0" wrap="none">
+          <a:bodyPr rtlCol="0" anchor="t" lIns="45720" tIns="99060" rIns="45720" bIns="0" wrap="none">
             <a:noAutofit/>
           </a:bodyPr>
           <a:lstStyle/>
           <a:p>
             <a:pPr algn="ctr">
               <a:lnSpc>
-                <a:spcPts val="1439"/>
+                <a:spcPts val="1560"/>
               </a:lnSpc>
             </a:pPr>
             <a:r>
-              <a:rPr sz="1140" b="1">
-                <a:solidFill>
-                  <a:srgbClr val="0A2342"/>
+              <a:rPr sz="1200" b="1">
+                <a:solidFill>
+                  <a:srgbClr val="0B2545"/>
                 </a:solidFill>
                 <a:latin typeface="Pretendard"/>
                 <a:ea typeface="Pretendard"/>
@@ -4445,11 +4445,11 @@
           <a:p>
             <a:pPr algn="ctr">
               <a:lnSpc>
-                <a:spcPts val="1140"/>
+                <a:spcPts val="1320"/>
               </a:lnSpc>
             </a:pPr>
             <a:r>
-              <a:rPr sz="869" b="0">
+              <a:rPr sz="1019" b="0">
                 <a:solidFill>
                   <a:srgbClr val="3F4E61"/>
                 </a:solidFill>
@@ -4470,8 +4470,8 @@
         </p:nvSpPr>
         <p:spPr>
           <a:xfrm>
-            <a:off x="5882640" y="3017520"/>
-            <a:ext cx="1600200" cy="624840"/>
+            <a:off x="5897880" y="3048000"/>
+            <a:ext cx="1706880" cy="624840"/>
           </a:xfrm>
           <a:prstGeom prst="roundRect">
             <a:avLst>
@@ -4481,27 +4481,27 @@
           <a:solidFill>
             <a:srgbClr val="D3E5F8"/>
           </a:solidFill>
-          <a:ln w="18288">
+          <a:ln w="16764">
             <a:solidFill>
-              <a:srgbClr val="0F3C78"/>
+              <a:srgbClr val="1F4E8C"/>
             </a:solidFill>
           </a:ln>
         </p:spPr>
         <p:txBody>
-          <a:bodyPr rtlCol="0" anchor="t" lIns="45720" tIns="118110" rIns="45720" bIns="0" wrap="none">
+          <a:bodyPr rtlCol="0" anchor="t" lIns="45720" tIns="99060" rIns="45720" bIns="0" wrap="none">
             <a:noAutofit/>
           </a:bodyPr>
           <a:lstStyle/>
           <a:p>
             <a:pPr algn="ctr">
               <a:lnSpc>
-                <a:spcPts val="1439"/>
+                <a:spcPts val="1560"/>
               </a:lnSpc>
             </a:pPr>
             <a:r>
-              <a:rPr sz="1140" b="1">
-                <a:solidFill>
-                  <a:srgbClr val="0A2342"/>
+              <a:rPr sz="1200" b="1">
+                <a:solidFill>
+                  <a:srgbClr val="0B2545"/>
                 </a:solidFill>
                 <a:latin typeface="Pretendard"/>
                 <a:ea typeface="Pretendard"/>
@@ -4513,13 +4513,13 @@
           <a:p>
             <a:pPr algn="ctr">
               <a:lnSpc>
-                <a:spcPts val="1140"/>
+                <a:spcPts val="1320"/>
               </a:lnSpc>
             </a:pPr>
             <a:r>
-              <a:rPr sz="869" b="0">
-                <a:solidFill>
-                  <a:srgbClr val="3F4E61"/>
+              <a:rPr sz="1019" b="0">
+                <a:solidFill>
+                  <a:srgbClr val="16202C"/>
                 </a:solidFill>
                 <a:latin typeface="Pretendard"/>
                 <a:ea typeface="Pretendard"/>
@@ -4538,8 +4538,8 @@
         </p:nvSpPr>
         <p:spPr>
           <a:xfrm>
-            <a:off x="4191000" y="3779520"/>
-            <a:ext cx="1463040" cy="624840"/>
+            <a:off x="4191000" y="3794760"/>
+            <a:ext cx="1493520" cy="624840"/>
           </a:xfrm>
           <a:prstGeom prst="roundRect">
             <a:avLst>
@@ -4549,27 +4549,27 @@
           <a:solidFill>
             <a:srgbClr val="FFFFFF"/>
           </a:solidFill>
-          <a:ln w="12192">
+          <a:ln w="13716">
             <a:solidFill>
-              <a:srgbClr val="6F9BD1"/>
+              <a:srgbClr val="8EC3EC"/>
             </a:solidFill>
           </a:ln>
         </p:spPr>
         <p:txBody>
-          <a:bodyPr rtlCol="0" anchor="t" lIns="45720" tIns="118110" rIns="45720" bIns="0" wrap="none">
+          <a:bodyPr rtlCol="0" anchor="t" lIns="45720" tIns="99060" rIns="45720" bIns="0" wrap="none">
             <a:noAutofit/>
           </a:bodyPr>
           <a:lstStyle/>
           <a:p>
             <a:pPr algn="ctr">
               <a:lnSpc>
-                <a:spcPts val="1439"/>
+                <a:spcPts val="1560"/>
               </a:lnSpc>
             </a:pPr>
             <a:r>
-              <a:rPr sz="1140" b="1">
-                <a:solidFill>
-                  <a:srgbClr val="0A2342"/>
+              <a:rPr sz="1200" b="1">
+                <a:solidFill>
+                  <a:srgbClr val="0B2545"/>
                 </a:solidFill>
                 <a:latin typeface="Pretendard"/>
                 <a:ea typeface="Pretendard"/>
@@ -4581,11 +4581,11 @@
           <a:p>
             <a:pPr algn="ctr">
               <a:lnSpc>
-                <a:spcPts val="1140"/>
+                <a:spcPts val="1320"/>
               </a:lnSpc>
             </a:pPr>
             <a:r>
-              <a:rPr sz="869" b="0">
+              <a:rPr sz="1019" b="0">
                 <a:solidFill>
                   <a:srgbClr val="3F4E61"/>
                 </a:solidFill>
@@ -4606,8 +4606,8 @@
         </p:nvSpPr>
         <p:spPr>
           <a:xfrm>
-            <a:off x="5882640" y="3779520"/>
-            <a:ext cx="1600200" cy="624840"/>
+            <a:off x="5897880" y="3794760"/>
+            <a:ext cx="1706880" cy="624840"/>
           </a:xfrm>
           <a:prstGeom prst="roundRect">
             <a:avLst>
@@ -4617,27 +4617,27 @@
           <a:solidFill>
             <a:srgbClr val="D3E5F8"/>
           </a:solidFill>
-          <a:ln w="18288">
+          <a:ln w="16764">
             <a:solidFill>
-              <a:srgbClr val="0F3C78"/>
+              <a:srgbClr val="1F4E8C"/>
             </a:solidFill>
           </a:ln>
         </p:spPr>
         <p:txBody>
-          <a:bodyPr rtlCol="0" anchor="t" lIns="45720" tIns="118110" rIns="45720" bIns="0" wrap="none">
+          <a:bodyPr rtlCol="0" anchor="t" lIns="45720" tIns="99060" rIns="45720" bIns="0" wrap="none">
             <a:noAutofit/>
           </a:bodyPr>
           <a:lstStyle/>
           <a:p>
             <a:pPr algn="ctr">
               <a:lnSpc>
-                <a:spcPts val="1439"/>
+                <a:spcPts val="1560"/>
               </a:lnSpc>
             </a:pPr>
             <a:r>
-              <a:rPr sz="1140" b="1">
-                <a:solidFill>
-                  <a:srgbClr val="0A2342"/>
+              <a:rPr sz="1200" b="1">
+                <a:solidFill>
+                  <a:srgbClr val="0B2545"/>
                 </a:solidFill>
                 <a:latin typeface="Pretendard"/>
                 <a:ea typeface="Pretendard"/>
@@ -4649,19 +4649,19 @@
           <a:p>
             <a:pPr algn="ctr">
               <a:lnSpc>
-                <a:spcPts val="1140"/>
+                <a:spcPts val="1320"/>
               </a:lnSpc>
             </a:pPr>
             <a:r>
-              <a:rPr sz="869" b="0">
-                <a:solidFill>
-                  <a:srgbClr val="3F4E61"/>
-                </a:solidFill>
-                <a:latin typeface="Pretendard"/>
-                <a:ea typeface="Pretendard"/>
-                <a:cs typeface="Pretendard"/>
-              </a:rPr>
-              <a:t>낙관적 잠금이면 별도 설계</a:t>
+              <a:rPr sz="1019" b="0">
+                <a:solidFill>
+                  <a:srgbClr val="16202C"/>
+                </a:solidFill>
+                <a:latin typeface="Pretendard"/>
+                <a:ea typeface="Pretendard"/>
+                <a:cs typeface="Pretendard"/>
+              </a:rPr>
+              <a:t>잠금용이면 별도 설계</a:t>
             </a:r>
           </a:p>
         </p:txBody>
@@ -4675,7 +4675,7 @@
         <p:spPr>
           <a:xfrm>
             <a:off x="4191000" y="4541520"/>
-            <a:ext cx="1463040" cy="624840"/>
+            <a:ext cx="1493520" cy="624840"/>
           </a:xfrm>
           <a:prstGeom prst="roundRect">
             <a:avLst>
@@ -4685,27 +4685,27 @@
           <a:solidFill>
             <a:srgbClr val="FFFFFF"/>
           </a:solidFill>
-          <a:ln w="12192">
+          <a:ln w="13716">
             <a:solidFill>
-              <a:srgbClr val="6F9BD1"/>
+              <a:srgbClr val="8EC3EC"/>
             </a:solidFill>
           </a:ln>
         </p:spPr>
         <p:txBody>
-          <a:bodyPr rtlCol="0" anchor="t" lIns="45720" tIns="118110" rIns="45720" bIns="0" wrap="none">
+          <a:bodyPr rtlCol="0" anchor="t" lIns="45720" tIns="99060" rIns="45720" bIns="0" wrap="none">
             <a:noAutofit/>
           </a:bodyPr>
           <a:lstStyle/>
           <a:p>
             <a:pPr algn="ctr">
               <a:lnSpc>
-                <a:spcPts val="1439"/>
+                <a:spcPts val="1560"/>
               </a:lnSpc>
             </a:pPr>
             <a:r>
-              <a:rPr sz="1140" b="1">
-                <a:solidFill>
-                  <a:srgbClr val="0A2342"/>
+              <a:rPr sz="1200" b="1">
+                <a:solidFill>
+                  <a:srgbClr val="0B2545"/>
                 </a:solidFill>
                 <a:latin typeface="Pretendard"/>
                 <a:ea typeface="Pretendard"/>
@@ -4717,11 +4717,11 @@
           <a:p>
             <a:pPr algn="ctr">
               <a:lnSpc>
-                <a:spcPts val="1140"/>
+                <a:spcPts val="1320"/>
               </a:lnSpc>
             </a:pPr>
             <a:r>
-              <a:rPr sz="869" b="0">
+              <a:rPr sz="1019" b="0">
                 <a:solidFill>
                   <a:srgbClr val="3F4E61"/>
                 </a:solidFill>
@@ -4742,8 +4742,8 @@
         </p:nvSpPr>
         <p:spPr>
           <a:xfrm>
-            <a:off x="5882640" y="4541520"/>
-            <a:ext cx="1600200" cy="624840"/>
+            <a:off x="5897880" y="4541520"/>
+            <a:ext cx="1706880" cy="624840"/>
           </a:xfrm>
           <a:prstGeom prst="roundRect">
             <a:avLst>
@@ -4753,27 +4753,27 @@
           <a:solidFill>
             <a:srgbClr val="D3E5F8"/>
           </a:solidFill>
-          <a:ln w="18288">
+          <a:ln w="16764">
             <a:solidFill>
-              <a:srgbClr val="0F3C78"/>
+              <a:srgbClr val="1F4E8C"/>
             </a:solidFill>
           </a:ln>
         </p:spPr>
         <p:txBody>
-          <a:bodyPr rtlCol="0" anchor="t" lIns="45720" tIns="118110" rIns="45720" bIns="0" wrap="none">
+          <a:bodyPr rtlCol="0" anchor="t" lIns="45720" tIns="99060" rIns="45720" bIns="0" wrap="none">
             <a:noAutofit/>
           </a:bodyPr>
           <a:lstStyle/>
           <a:p>
             <a:pPr algn="ctr">
               <a:lnSpc>
-                <a:spcPts val="1439"/>
+                <a:spcPts val="1560"/>
               </a:lnSpc>
             </a:pPr>
             <a:r>
-              <a:rPr sz="1140" b="1">
-                <a:solidFill>
-                  <a:srgbClr val="0A2342"/>
+              <a:rPr sz="1200" b="1">
+                <a:solidFill>
+                  <a:srgbClr val="0B2545"/>
                 </a:solidFill>
                 <a:latin typeface="Pretendard"/>
                 <a:ea typeface="Pretendard"/>
@@ -4785,13 +4785,13 @@
           <a:p>
             <a:pPr algn="ctr">
               <a:lnSpc>
-                <a:spcPts val="1140"/>
+                <a:spcPts val="1320"/>
               </a:lnSpc>
             </a:pPr>
             <a:r>
-              <a:rPr sz="869" b="0">
-                <a:solidFill>
-                  <a:srgbClr val="3F4E61"/>
+              <a:rPr sz="1019" b="0">
+                <a:solidFill>
+                  <a:srgbClr val="16202C"/>
                 </a:solidFill>
                 <a:latin typeface="Pretendard"/>
                 <a:ea typeface="Pretendard"/>
@@ -4811,7 +4811,7 @@
         <p:spPr>
           <a:xfrm>
             <a:off x="548640" y="5349240"/>
-            <a:ext cx="7056120" cy="396240"/>
+            <a:ext cx="7056120" cy="426720"/>
           </a:xfrm>
           <a:prstGeom prst="roundRect">
             <a:avLst>
@@ -4823,21 +4823,21 @@
           </a:solidFill>
           <a:ln w="15240">
             <a:solidFill>
-              <a:srgbClr val="164B8C"/>
+              <a:srgbClr val="1F4E8C"/>
             </a:solidFill>
           </a:ln>
         </p:spPr>
         <p:txBody>
-          <a:bodyPr rtlCol="0" anchor="ctr" lIns="734377" tIns="0" rIns="0" bIns="0" wrap="none">
+          <a:bodyPr rtlCol="0" anchor="ctr" lIns="561975" tIns="0" rIns="0" bIns="0" wrap="none">
             <a:noAutofit/>
           </a:bodyPr>
           <a:lstStyle/>
           <a:p>
             <a:pPr algn="l"/>
             <a:r>
-              <a:rPr sz="1019" b="1">
-                <a:solidFill>
-                  <a:srgbClr val="0A2342"/>
+              <a:rPr sz="1080" b="1">
+                <a:solidFill>
+                  <a:srgbClr val="0B2545"/>
                 </a:solidFill>
                 <a:latin typeface="Pretendard"/>
                 <a:ea typeface="Pretendard"/>
@@ -4856,7 +4856,7 @@
         </p:nvSpPr>
         <p:spPr>
           <a:xfrm>
-            <a:off x="1033462" y="5473065"/>
+            <a:off x="861060" y="5488305"/>
             <a:ext cx="148590" cy="148590"/>
           </a:xfrm>
           <a:custGeom>
@@ -4874,25 +4874,25 @@
                   <a:pt x="74772" y="115349"/>
                 </a:lnTo>
                 <a:lnTo>
-                  <a:pt x="75239" y="115303"/>
-                </a:lnTo>
-                <a:lnTo>
-                  <a:pt x="75695" y="115228"/>
+                  <a:pt x="75238" y="115303"/>
+                </a:lnTo>
+                <a:lnTo>
+                  <a:pt x="75694" y="115228"/>
                 </a:lnTo>
                 <a:lnTo>
                   <a:pt x="76141" y="115123"/>
                 </a:lnTo>
                 <a:lnTo>
-                  <a:pt x="76578" y="114987"/>
+                  <a:pt x="76577" y="114987"/>
                 </a:lnTo>
                 <a:lnTo>
                   <a:pt x="77004" y="114822"/>
                 </a:lnTo>
                 <a:lnTo>
-                  <a:pt x="77421" y="114626"/>
-                </a:lnTo>
-                <a:lnTo>
-                  <a:pt x="77827" y="114401"/>
+                  <a:pt x="77420" y="114626"/>
+                </a:lnTo>
+                <a:lnTo>
+                  <a:pt x="77826" y="114401"/>
                 </a:lnTo>
                 <a:lnTo>
                   <a:pt x="78223" y="114145"/>
@@ -4901,34 +4901,34 @@
                   <a:pt x="78609" y="113859"/>
                 </a:lnTo>
                 <a:lnTo>
-                  <a:pt x="78986" y="113543"/>
-                </a:lnTo>
-                <a:lnTo>
-                  <a:pt x="79352" y="113197"/>
-                </a:lnTo>
-                <a:lnTo>
-                  <a:pt x="79698" y="112831"/>
-                </a:lnTo>
-                <a:lnTo>
-                  <a:pt x="80014" y="112454"/>
-                </a:lnTo>
-                <a:lnTo>
-                  <a:pt x="80300" y="112068"/>
-                </a:lnTo>
-                <a:lnTo>
-                  <a:pt x="80556" y="111672"/>
+                  <a:pt x="78985" y="113543"/>
+                </a:lnTo>
+                <a:lnTo>
+                  <a:pt x="79351" y="113197"/>
+                </a:lnTo>
+                <a:lnTo>
+                  <a:pt x="79697" y="112831"/>
+                </a:lnTo>
+                <a:lnTo>
+                  <a:pt x="80013" y="112454"/>
+                </a:lnTo>
+                <a:lnTo>
+                  <a:pt x="80299" y="112068"/>
+                </a:lnTo>
+                <a:lnTo>
+                  <a:pt x="80555" y="111672"/>
                 </a:lnTo>
                 <a:lnTo>
                   <a:pt x="80781" y="111266"/>
                 </a:lnTo>
                 <a:lnTo>
-                  <a:pt x="80977" y="110849"/>
+                  <a:pt x="80976" y="110849"/>
                 </a:lnTo>
                 <a:lnTo>
                   <a:pt x="81142" y="110423"/>
                 </a:lnTo>
                 <a:lnTo>
-                  <a:pt x="81278" y="109986"/>
+                  <a:pt x="81277" y="109986"/>
                 </a:lnTo>
                 <a:lnTo>
                   <a:pt x="81383" y="109540"/>
@@ -4937,13 +4937,13 @@
                   <a:pt x="81458" y="109084"/>
                 </a:lnTo>
                 <a:lnTo>
-                  <a:pt x="81504" y="108617"/>
-                </a:lnTo>
-                <a:lnTo>
-                  <a:pt x="81519" y="108141"/>
-                </a:lnTo>
-                <a:lnTo>
-                  <a:pt x="81504" y="107664"/>
+                  <a:pt x="81503" y="108617"/>
+                </a:lnTo>
+                <a:lnTo>
+                  <a:pt x="81518" y="108141"/>
+                </a:lnTo>
+                <a:lnTo>
+                  <a:pt x="81503" y="107664"/>
                 </a:lnTo>
                 <a:lnTo>
                   <a:pt x="81458" y="107197"/>
@@ -4952,34 +4952,34 @@
                   <a:pt x="81383" y="106741"/>
                 </a:lnTo>
                 <a:lnTo>
-                  <a:pt x="81278" y="106295"/>
+                  <a:pt x="81277" y="106295"/>
                 </a:lnTo>
                 <a:lnTo>
                   <a:pt x="81142" y="105858"/>
                 </a:lnTo>
                 <a:lnTo>
-                  <a:pt x="80977" y="105432"/>
+                  <a:pt x="80976" y="105432"/>
                 </a:lnTo>
                 <a:lnTo>
                   <a:pt x="80781" y="105015"/>
                 </a:lnTo>
                 <a:lnTo>
-                  <a:pt x="80556" y="104609"/>
-                </a:lnTo>
-                <a:lnTo>
-                  <a:pt x="80300" y="104213"/>
-                </a:lnTo>
-                <a:lnTo>
-                  <a:pt x="80014" y="103827"/>
-                </a:lnTo>
-                <a:lnTo>
-                  <a:pt x="79698" y="103450"/>
-                </a:lnTo>
-                <a:lnTo>
-                  <a:pt x="79352" y="103084"/>
-                </a:lnTo>
-                <a:lnTo>
-                  <a:pt x="78986" y="102738"/>
+                  <a:pt x="80555" y="104609"/>
+                </a:lnTo>
+                <a:lnTo>
+                  <a:pt x="80299" y="104213"/>
+                </a:lnTo>
+                <a:lnTo>
+                  <a:pt x="80013" y="103827"/>
+                </a:lnTo>
+                <a:lnTo>
+                  <a:pt x="79697" y="103450"/>
+                </a:lnTo>
+                <a:lnTo>
+                  <a:pt x="79351" y="103084"/>
+                </a:lnTo>
+                <a:lnTo>
+                  <a:pt x="78985" y="102738"/>
                 </a:lnTo>
                 <a:lnTo>
                   <a:pt x="78609" y="102422"/>
@@ -4988,25 +4988,25 @@
                   <a:pt x="78223" y="102136"/>
                 </a:lnTo>
                 <a:lnTo>
-                  <a:pt x="77827" y="101880"/>
-                </a:lnTo>
-                <a:lnTo>
-                  <a:pt x="77421" y="101655"/>
+                  <a:pt x="77826" y="101880"/>
+                </a:lnTo>
+                <a:lnTo>
+                  <a:pt x="77420" y="101655"/>
                 </a:lnTo>
                 <a:lnTo>
                   <a:pt x="77004" y="101459"/>
                 </a:lnTo>
                 <a:lnTo>
-                  <a:pt x="76578" y="101294"/>
+                  <a:pt x="76577" y="101294"/>
                 </a:lnTo>
                 <a:lnTo>
                   <a:pt x="76141" y="101158"/>
                 </a:lnTo>
                 <a:lnTo>
-                  <a:pt x="75695" y="101053"/>
-                </a:lnTo>
-                <a:lnTo>
-                  <a:pt x="75239" y="100978"/>
+                  <a:pt x="75694" y="101053"/>
+                </a:lnTo>
+                <a:lnTo>
+                  <a:pt x="75238" y="100978"/>
                 </a:lnTo>
                 <a:lnTo>
                   <a:pt x="74772" y="100932"/>
@@ -5015,7 +5015,7 @@
                   <a:pt x="74295" y="100917"/>
                 </a:lnTo>
                 <a:lnTo>
-                  <a:pt x="73819" y="100932"/>
+                  <a:pt x="73818" y="100932"/>
                 </a:lnTo>
                 <a:lnTo>
                   <a:pt x="73352" y="100978"/>
@@ -5024,13 +5024,13 @@
                   <a:pt x="72896" y="101053"/>
                 </a:lnTo>
                 <a:lnTo>
-                  <a:pt x="72450" y="101158"/>
+                  <a:pt x="72449" y="101158"/>
                 </a:lnTo>
                 <a:lnTo>
                   <a:pt x="72013" y="101294"/>
                 </a:lnTo>
                 <a:lnTo>
-                  <a:pt x="71587" y="101459"/>
+                  <a:pt x="71586" y="101459"/>
                 </a:lnTo>
                 <a:lnTo>
                   <a:pt x="71170" y="101655"/>
@@ -5039,10 +5039,10 @@
                   <a:pt x="70764" y="101880"/>
                 </a:lnTo>
                 <a:lnTo>
-                  <a:pt x="70368" y="102136"/>
-                </a:lnTo>
-                <a:lnTo>
-                  <a:pt x="69982" y="102422"/>
+                  <a:pt x="70367" y="102136"/>
+                </a:lnTo>
+                <a:lnTo>
+                  <a:pt x="69981" y="102422"/>
                 </a:lnTo>
                 <a:lnTo>
                   <a:pt x="69605" y="102738"/>
@@ -5063,22 +5063,22 @@
                   <a:pt x="68035" y="104609"/>
                 </a:lnTo>
                 <a:lnTo>
-                  <a:pt x="67810" y="105015"/>
+                  <a:pt x="67809" y="105015"/>
                 </a:lnTo>
                 <a:lnTo>
                   <a:pt x="67614" y="105432"/>
                 </a:lnTo>
                 <a:lnTo>
-                  <a:pt x="67449" y="105858"/>
+                  <a:pt x="67448" y="105858"/>
                 </a:lnTo>
                 <a:lnTo>
                   <a:pt x="67313" y="106295"/>
                 </a:lnTo>
                 <a:lnTo>
-                  <a:pt x="67208" y="106741"/>
-                </a:lnTo>
-                <a:lnTo>
-                  <a:pt x="67133" y="107197"/>
+                  <a:pt x="67207" y="106741"/>
+                </a:lnTo>
+                <a:lnTo>
+                  <a:pt x="67132" y="107197"/>
                 </a:lnTo>
                 <a:lnTo>
                   <a:pt x="67087" y="107664"/>
@@ -5090,22 +5090,22 @@
                   <a:pt x="67087" y="108617"/>
                 </a:lnTo>
                 <a:lnTo>
-                  <a:pt x="67133" y="109084"/>
-                </a:lnTo>
-                <a:lnTo>
-                  <a:pt x="67208" y="109540"/>
+                  <a:pt x="67132" y="109084"/>
+                </a:lnTo>
+                <a:lnTo>
+                  <a:pt x="67207" y="109540"/>
                 </a:lnTo>
                 <a:lnTo>
                   <a:pt x="67313" y="109986"/>
                 </a:lnTo>
                 <a:lnTo>
-                  <a:pt x="67449" y="110423"/>
+                  <a:pt x="67448" y="110423"/>
                 </a:lnTo>
                 <a:lnTo>
                   <a:pt x="67614" y="110849"/>
                 </a:lnTo>
                 <a:lnTo>
-                  <a:pt x="67810" y="111266"/>
+                  <a:pt x="67809" y="111266"/>
                 </a:lnTo>
                 <a:lnTo>
                   <a:pt x="68035" y="111672"/>
@@ -5126,10 +5126,10 @@
                   <a:pt x="69605" y="113543"/>
                 </a:lnTo>
                 <a:lnTo>
-                  <a:pt x="69982" y="113859"/>
-                </a:lnTo>
-                <a:lnTo>
-                  <a:pt x="70368" y="114145"/>
+                  <a:pt x="69981" y="113859"/>
+                </a:lnTo>
+                <a:lnTo>
+                  <a:pt x="70367" y="114145"/>
                 </a:lnTo>
                 <a:lnTo>
                   <a:pt x="70764" y="114401"/>
@@ -5138,13 +5138,13 @@
                   <a:pt x="71170" y="114626"/>
                 </a:lnTo>
                 <a:lnTo>
-                  <a:pt x="71587" y="114822"/>
+                  <a:pt x="71586" y="114822"/>
                 </a:lnTo>
                 <a:lnTo>
                   <a:pt x="72013" y="114987"/>
                 </a:lnTo>
                 <a:lnTo>
-                  <a:pt x="72450" y="115123"/>
+                  <a:pt x="72449" y="115123"/>
                 </a:lnTo>
                 <a:lnTo>
                   <a:pt x="72896" y="115228"/>
@@ -5153,7 +5153,7 @@
                   <a:pt x="73352" y="115303"/>
                 </a:lnTo>
                 <a:lnTo>
-                  <a:pt x="73819" y="115349"/>
+                  <a:pt x="73818" y="115349"/>
                 </a:lnTo>
                 <a:lnTo>
                   <a:pt x="74295" y="115364"/>
@@ -5163,10 +5163,10 @@
                   <a:pt x="68104" y="85646"/>
                 </a:moveTo>
                 <a:lnTo>
-                  <a:pt x="80487" y="85646"/>
-                </a:lnTo>
-                <a:lnTo>
-                  <a:pt x="80487" y="31369"/>
+                  <a:pt x="80486" y="85646"/>
+                </a:lnTo>
+                <a:lnTo>
+                  <a:pt x="80486" y="31369"/>
                 </a:lnTo>
                 <a:lnTo>
                   <a:pt x="68104" y="31369"/>
@@ -5188,7 +5188,7 @@
                   <a:pt x="43339" y="0"/>
                 </a:lnTo>
                 <a:lnTo>
-                  <a:pt x="105252" y="0"/>
+                  <a:pt x="105251" y="0"/>
                 </a:lnTo>
                 <a:lnTo>
                   <a:pt x="148590" y="43339"/>
@@ -5197,14 +5197,14 @@
                   <a:pt x="148590" y="105251"/>
                 </a:lnTo>
                 <a:lnTo>
-                  <a:pt x="105252" y="148590"/>
+                  <a:pt x="105251" y="148590"/>
                 </a:lnTo>
                 <a:lnTo>
                   <a:pt x="43339" y="148590"/>
                 </a:lnTo>
                 <a:close/>
                 <a:moveTo>
-                  <a:pt x="48499" y="136207"/>
+                  <a:pt x="48498" y="136207"/>
                 </a:moveTo>
                 <a:lnTo>
                   <a:pt x="100092" y="136207"/>
@@ -5219,23 +5219,23 @@
                   <a:pt x="100092" y="12383"/>
                 </a:lnTo>
                 <a:lnTo>
-                  <a:pt x="48499" y="12383"/>
-                </a:lnTo>
-                <a:lnTo>
-                  <a:pt x="12383" y="48498"/>
-                </a:lnTo>
-                <a:lnTo>
-                  <a:pt x="12383" y="100092"/>
-                </a:lnTo>
-                <a:lnTo>
-                  <a:pt x="48499" y="136207"/>
+                  <a:pt x="48498" y="12383"/>
+                </a:lnTo>
+                <a:lnTo>
+                  <a:pt x="12382" y="48498"/>
+                </a:lnTo>
+                <a:lnTo>
+                  <a:pt x="12382" y="100092"/>
+                </a:lnTo>
+                <a:lnTo>
+                  <a:pt x="48498" y="136207"/>
                 </a:lnTo>
                 <a:close/>
               </a:path>
             </a:pathLst>
           </a:custGeom>
           <a:solidFill>
-            <a:srgbClr val="164B8C"/>
+            <a:srgbClr val="1F4E8C"/>
           </a:solidFill>
           <a:ln>
             <a:noFill/>
@@ -5257,38 +5257,38 @@
         </p:nvSpPr>
         <p:spPr>
           <a:xfrm>
-            <a:off x="8092440" y="1447800"/>
-            <a:ext cx="3550920" cy="579120"/>
+            <a:off x="8092440" y="1524000"/>
+            <a:ext cx="3550920" cy="563880"/>
           </a:xfrm>
           <a:prstGeom prst="roundRect">
             <a:avLst>
-              <a:gd name="adj" fmla="val 15789"/>
+              <a:gd name="adj" fmla="val 16216"/>
             </a:avLst>
           </a:prstGeom>
           <a:solidFill>
             <a:srgbClr val="FFFFFF"/>
           </a:solidFill>
-          <a:ln w="12192">
+          <a:ln w="13716">
             <a:solidFill>
-              <a:srgbClr val="6F9BD1"/>
+              <a:srgbClr val="8EC3EC"/>
             </a:solidFill>
           </a:ln>
         </p:spPr>
         <p:txBody>
-          <a:bodyPr rtlCol="0" anchor="t" lIns="45720" tIns="95250" rIns="45720" bIns="0" wrap="none">
+          <a:bodyPr rtlCol="0" anchor="t" lIns="45720" tIns="68580" rIns="45720" bIns="0" wrap="none">
             <a:noAutofit/>
           </a:bodyPr>
           <a:lstStyle/>
           <a:p>
             <a:pPr algn="ctr">
               <a:lnSpc>
-                <a:spcPts val="1439"/>
+                <a:spcPts val="1560"/>
               </a:lnSpc>
             </a:pPr>
             <a:r>
-              <a:rPr sz="1140" b="1">
-                <a:solidFill>
-                  <a:srgbClr val="0A2342"/>
+              <a:rPr sz="1200" b="1">
+                <a:solidFill>
+                  <a:srgbClr val="0B2545"/>
                 </a:solidFill>
                 <a:latin typeface="Pretendard"/>
                 <a:ea typeface="Pretendard"/>
@@ -5300,11 +5300,11 @@
           <a:p>
             <a:pPr algn="ctr">
               <a:lnSpc>
-                <a:spcPts val="1140"/>
+                <a:spcPts val="1320"/>
               </a:lnSpc>
             </a:pPr>
             <a:r>
-              <a:rPr sz="869" b="0">
+              <a:rPr sz="1019" b="0">
                 <a:solidFill>
                   <a:srgbClr val="3F4E61"/>
                 </a:solidFill>
@@ -5325,14 +5325,14 @@
         </p:nvSpPr>
         <p:spPr>
           <a:xfrm>
-            <a:off x="8145780" y="1501140"/>
-            <a:ext cx="198120" cy="198120"/>
+            <a:off x="8145780" y="1577340"/>
+            <a:ext cx="213360" cy="213360"/>
           </a:xfrm>
           <a:prstGeom prst="ellipse">
             <a:avLst/>
           </a:prstGeom>
           <a:solidFill>
-            <a:srgbClr val="164B8C"/>
+            <a:srgbClr val="1F4E8C"/>
           </a:solidFill>
           <a:ln>
             <a:noFill/>
@@ -5346,7 +5346,7 @@
           <a:p>
             <a:pPr algn="ctr"/>
             <a:r>
-              <a:rPr sz="900" b="1">
+              <a:rPr sz="1019" b="1">
                 <a:solidFill>
                   <a:srgbClr val="FFFFFF"/>
                 </a:solidFill>
@@ -5367,38 +5367,38 @@
         </p:nvSpPr>
         <p:spPr>
           <a:xfrm>
-            <a:off x="8092440" y="2133600"/>
-            <a:ext cx="3550920" cy="579120"/>
+            <a:off x="8092440" y="2194560"/>
+            <a:ext cx="3550920" cy="563880"/>
           </a:xfrm>
           <a:prstGeom prst="roundRect">
             <a:avLst>
-              <a:gd name="adj" fmla="val 15789"/>
+              <a:gd name="adj" fmla="val 16216"/>
             </a:avLst>
           </a:prstGeom>
           <a:solidFill>
             <a:srgbClr val="FFFFFF"/>
           </a:solidFill>
-          <a:ln w="12192">
+          <a:ln w="13716">
             <a:solidFill>
-              <a:srgbClr val="6F9BD1"/>
+              <a:srgbClr val="8EC3EC"/>
             </a:solidFill>
           </a:ln>
         </p:spPr>
         <p:txBody>
-          <a:bodyPr rtlCol="0" anchor="t" lIns="45720" tIns="95250" rIns="45720" bIns="0" wrap="none">
+          <a:bodyPr rtlCol="0" anchor="t" lIns="45720" tIns="68580" rIns="45720" bIns="0" wrap="none">
             <a:noAutofit/>
           </a:bodyPr>
           <a:lstStyle/>
           <a:p>
             <a:pPr algn="ctr">
               <a:lnSpc>
-                <a:spcPts val="1439"/>
+                <a:spcPts val="1560"/>
               </a:lnSpc>
             </a:pPr>
             <a:r>
-              <a:rPr sz="1140" b="1">
-                <a:solidFill>
-                  <a:srgbClr val="0A2342"/>
+              <a:rPr sz="1200" b="1">
+                <a:solidFill>
+                  <a:srgbClr val="0B2545"/>
                 </a:solidFill>
                 <a:latin typeface="Pretendard"/>
                 <a:ea typeface="Pretendard"/>
@@ -5410,11 +5410,11 @@
           <a:p>
             <a:pPr algn="ctr">
               <a:lnSpc>
-                <a:spcPts val="1140"/>
+                <a:spcPts val="1320"/>
               </a:lnSpc>
             </a:pPr>
             <a:r>
-              <a:rPr sz="869" b="0">
+              <a:rPr sz="1019" b="0">
                 <a:solidFill>
                   <a:srgbClr val="3F4E61"/>
                 </a:solidFill>
@@ -5435,14 +5435,14 @@
         </p:nvSpPr>
         <p:spPr>
           <a:xfrm>
-            <a:off x="8145780" y="2186940"/>
-            <a:ext cx="198120" cy="198120"/>
+            <a:off x="8145780" y="2247900"/>
+            <a:ext cx="213360" cy="213360"/>
           </a:xfrm>
           <a:prstGeom prst="ellipse">
             <a:avLst/>
           </a:prstGeom>
           <a:solidFill>
-            <a:srgbClr val="164B8C"/>
+            <a:srgbClr val="1F4E8C"/>
           </a:solidFill>
           <a:ln>
             <a:noFill/>
@@ -5456,7 +5456,7 @@
           <a:p>
             <a:pPr algn="ctr"/>
             <a:r>
-              <a:rPr sz="900" b="1">
+              <a:rPr sz="1019" b="1">
                 <a:solidFill>
                   <a:srgbClr val="FFFFFF"/>
                 </a:solidFill>
@@ -5477,38 +5477,38 @@
         </p:nvSpPr>
         <p:spPr>
           <a:xfrm>
-            <a:off x="8092440" y="2819400"/>
-            <a:ext cx="3550920" cy="579120"/>
+            <a:off x="8092440" y="2865120"/>
+            <a:ext cx="3550920" cy="563880"/>
           </a:xfrm>
           <a:prstGeom prst="roundRect">
             <a:avLst>
-              <a:gd name="adj" fmla="val 15789"/>
+              <a:gd name="adj" fmla="val 16216"/>
             </a:avLst>
           </a:prstGeom>
           <a:solidFill>
             <a:srgbClr val="FFFFFF"/>
           </a:solidFill>
-          <a:ln w="12192">
+          <a:ln w="13716">
             <a:solidFill>
-              <a:srgbClr val="6F9BD1"/>
+              <a:srgbClr val="8EC3EC"/>
             </a:solidFill>
           </a:ln>
         </p:spPr>
         <p:txBody>
-          <a:bodyPr rtlCol="0" anchor="t" lIns="45720" tIns="95250" rIns="45720" bIns="0" wrap="none">
+          <a:bodyPr rtlCol="0" anchor="t" lIns="45720" tIns="68580" rIns="45720" bIns="0" wrap="none">
             <a:noAutofit/>
           </a:bodyPr>
           <a:lstStyle/>
           <a:p>
             <a:pPr algn="ctr">
               <a:lnSpc>
-                <a:spcPts val="1439"/>
+                <a:spcPts val="1560"/>
               </a:lnSpc>
             </a:pPr>
             <a:r>
-              <a:rPr sz="1140" b="1">
-                <a:solidFill>
-                  <a:srgbClr val="0A2342"/>
+              <a:rPr sz="1200" b="1">
+                <a:solidFill>
+                  <a:srgbClr val="0B2545"/>
                 </a:solidFill>
                 <a:latin typeface="Pretendard"/>
                 <a:ea typeface="Pretendard"/>
@@ -5520,11 +5520,11 @@
           <a:p>
             <a:pPr algn="ctr">
               <a:lnSpc>
-                <a:spcPts val="1140"/>
+                <a:spcPts val="1320"/>
               </a:lnSpc>
             </a:pPr>
             <a:r>
-              <a:rPr sz="869" b="0">
+              <a:rPr sz="1019" b="0">
                 <a:solidFill>
                   <a:srgbClr val="3F4E61"/>
                 </a:solidFill>
@@ -5545,14 +5545,14 @@
         </p:nvSpPr>
         <p:spPr>
           <a:xfrm>
-            <a:off x="8145780" y="2872740"/>
-            <a:ext cx="198120" cy="198120"/>
+            <a:off x="8145780" y="2918460"/>
+            <a:ext cx="213360" cy="213360"/>
           </a:xfrm>
           <a:prstGeom prst="ellipse">
             <a:avLst/>
           </a:prstGeom>
           <a:solidFill>
-            <a:srgbClr val="164B8C"/>
+            <a:srgbClr val="1F4E8C"/>
           </a:solidFill>
           <a:ln>
             <a:noFill/>
@@ -5566,7 +5566,7 @@
           <a:p>
             <a:pPr algn="ctr"/>
             <a:r>
-              <a:rPr sz="900" b="1">
+              <a:rPr sz="1019" b="1">
                 <a:solidFill>
                   <a:srgbClr val="FFFFFF"/>
                 </a:solidFill>
@@ -5598,27 +5598,27 @@
           <a:solidFill>
             <a:srgbClr val="FFFFFF"/>
           </a:solidFill>
-          <a:ln w="12192">
+          <a:ln w="13716">
             <a:solidFill>
-              <a:srgbClr val="6F9BD1"/>
+              <a:srgbClr val="8EC3EC"/>
             </a:solidFill>
           </a:ln>
         </p:spPr>
         <p:txBody>
-          <a:bodyPr rtlCol="0" anchor="t" lIns="45720" tIns="179070" rIns="45720" bIns="0" wrap="none">
+          <a:bodyPr rtlCol="0" anchor="t" lIns="45720" tIns="160020" rIns="45720" bIns="0" wrap="none">
             <a:noAutofit/>
           </a:bodyPr>
           <a:lstStyle/>
           <a:p>
             <a:pPr algn="ctr">
               <a:lnSpc>
-                <a:spcPts val="1439"/>
+                <a:spcPts val="1560"/>
               </a:lnSpc>
             </a:pPr>
             <a:r>
-              <a:rPr sz="1140" b="1">
-                <a:solidFill>
-                  <a:srgbClr val="0A2342"/>
+              <a:rPr sz="1200" b="1">
+                <a:solidFill>
+                  <a:srgbClr val="0B2545"/>
                 </a:solidFill>
                 <a:latin typeface="Pretendard"/>
                 <a:ea typeface="Pretendard"/>
@@ -5630,11 +5630,11 @@
           <a:p>
             <a:pPr algn="ctr">
               <a:lnSpc>
-                <a:spcPts val="1140"/>
+                <a:spcPts val="1320"/>
               </a:lnSpc>
             </a:pPr>
             <a:r>
-              <a:rPr sz="869" b="0">
+              <a:rPr sz="1019" b="0">
                 <a:solidFill>
                   <a:srgbClr val="3F4E61"/>
                 </a:solidFill>
@@ -5666,27 +5666,27 @@
           <a:solidFill>
             <a:srgbClr val="FFFFFF"/>
           </a:solidFill>
-          <a:ln w="12192">
+          <a:ln w="13716">
             <a:solidFill>
-              <a:srgbClr val="6F9BD1"/>
+              <a:srgbClr val="8EC3EC"/>
             </a:solidFill>
           </a:ln>
         </p:spPr>
         <p:txBody>
-          <a:bodyPr rtlCol="0" anchor="t" lIns="45720" tIns="179070" rIns="45720" bIns="0" wrap="none">
+          <a:bodyPr rtlCol="0" anchor="t" lIns="45720" tIns="76200" rIns="45720" bIns="0" wrap="none">
             <a:noAutofit/>
           </a:bodyPr>
           <a:lstStyle/>
           <a:p>
             <a:pPr algn="ctr">
               <a:lnSpc>
-                <a:spcPts val="1439"/>
+                <a:spcPts val="1560"/>
               </a:lnSpc>
             </a:pPr>
             <a:r>
-              <a:rPr sz="1140" b="1">
-                <a:solidFill>
-                  <a:srgbClr val="0A2342"/>
+              <a:rPr sz="1200" b="1">
+                <a:solidFill>
+                  <a:srgbClr val="0B2545"/>
                 </a:solidFill>
                 <a:latin typeface="Pretendard"/>
                 <a:ea typeface="Pretendard"/>
@@ -5698,11 +5698,11 @@
           <a:p>
             <a:pPr algn="ctr">
               <a:lnSpc>
-                <a:spcPts val="1140"/>
+                <a:spcPts val="1320"/>
               </a:lnSpc>
             </a:pPr>
             <a:r>
-              <a:rPr sz="869" b="0">
+              <a:rPr sz="1019" b="0">
                 <a:solidFill>
                   <a:srgbClr val="3F4E61"/>
                 </a:solidFill>
@@ -5710,7 +5710,25 @@
                 <a:ea typeface="Pretendard"/>
                 <a:cs typeface="Pretendard"/>
               </a:rPr>
-              <a:t>fail · 적재 전 결정 (A02)</a:t>
+              <a:t>fail (A02)</a:t>
+            </a:r>
+          </a:p>
+          <a:p>
+            <a:pPr algn="ctr">
+              <a:lnSpc>
+                <a:spcPts val="1320"/>
+              </a:lnSpc>
+            </a:pPr>
+            <a:r>
+              <a:rPr sz="1019" b="0">
+                <a:solidFill>
+                  <a:srgbClr val="3F4E61"/>
+                </a:solidFill>
+                <a:latin typeface="Pretendard"/>
+                <a:ea typeface="Pretendard"/>
+                <a:cs typeface="Pretendard"/>
+              </a:rPr>
+              <a:t>확인한 컬럼만 replace</a:t>
             </a:r>
           </a:p>
         </p:txBody>
@@ -5734,27 +5752,27 @@
           <a:solidFill>
             <a:srgbClr val="FFFFFF"/>
           </a:solidFill>
-          <a:ln w="12192">
+          <a:ln w="13716">
             <a:solidFill>
-              <a:srgbClr val="6F9BD1"/>
+              <a:srgbClr val="8EC3EC"/>
             </a:solidFill>
           </a:ln>
         </p:spPr>
         <p:txBody>
-          <a:bodyPr rtlCol="0" anchor="t" lIns="45720" tIns="179070" rIns="45720" bIns="0" wrap="none">
+          <a:bodyPr rtlCol="0" anchor="t" lIns="45720" tIns="76200" rIns="45720" bIns="0" wrap="none">
             <a:noAutofit/>
           </a:bodyPr>
           <a:lstStyle/>
           <a:p>
             <a:pPr algn="ctr">
               <a:lnSpc>
-                <a:spcPts val="1439"/>
+                <a:spcPts val="1560"/>
               </a:lnSpc>
             </a:pPr>
             <a:r>
-              <a:rPr sz="1140" b="1">
-                <a:solidFill>
-                  <a:srgbClr val="0A2342"/>
+              <a:rPr sz="1200" b="1">
+                <a:solidFill>
+                  <a:srgbClr val="0B2545"/>
                 </a:solidFill>
                 <a:latin typeface="Pretendard"/>
                 <a:ea typeface="Pretendard"/>
@@ -5766,11 +5784,11 @@
           <a:p>
             <a:pPr algn="ctr">
               <a:lnSpc>
-                <a:spcPts val="1140"/>
+                <a:spcPts val="1320"/>
               </a:lnSpc>
             </a:pPr>
             <a:r>
-              <a:rPr sz="869" b="0">
+              <a:rPr sz="1019" b="0">
                 <a:solidFill>
                   <a:srgbClr val="3F4E61"/>
                 </a:solidFill>
@@ -5778,7 +5796,25 @@
                 <a:ea typeface="Pretendard"/>
                 <a:cs typeface="Pretendard"/>
               </a:rPr>
-              <a:t>CI UNIQUE → lower() (B14)</a:t>
+              <a:t>CI UNIQUE → lower()</a:t>
+            </a:r>
+          </a:p>
+          <a:p>
+            <a:pPr algn="ctr">
+              <a:lnSpc>
+                <a:spcPts val="1320"/>
+              </a:lnSpc>
+            </a:pPr>
+            <a:r>
+              <a:rPr sz="1019" b="0">
+                <a:solidFill>
+                  <a:srgbClr val="3F4E61"/>
+                </a:solidFill>
+                <a:latin typeface="Pretendard"/>
+                <a:ea typeface="Pretendard"/>
+                <a:cs typeface="Pretendard"/>
+              </a:rPr>
+              <a:t>(B14)</a:t>
             </a:r>
           </a:p>
         </p:txBody>
@@ -5802,27 +5838,27 @@
           <a:solidFill>
             <a:srgbClr val="FFFFFF"/>
           </a:solidFill>
-          <a:ln w="12192">
+          <a:ln w="13716">
             <a:solidFill>
-              <a:srgbClr val="6F9BD1"/>
+              <a:srgbClr val="8EC3EC"/>
             </a:solidFill>
           </a:ln>
         </p:spPr>
         <p:txBody>
-          <a:bodyPr rtlCol="0" anchor="t" lIns="45720" tIns="179070" rIns="45720" bIns="0" wrap="none">
+          <a:bodyPr rtlCol="0" anchor="t" lIns="45720" tIns="160020" rIns="45720" bIns="0" wrap="none">
             <a:noAutofit/>
           </a:bodyPr>
           <a:lstStyle/>
           <a:p>
             <a:pPr algn="ctr">
               <a:lnSpc>
-                <a:spcPts val="1439"/>
+                <a:spcPts val="1560"/>
               </a:lnSpc>
             </a:pPr>
             <a:r>
-              <a:rPr sz="1140" b="1">
-                <a:solidFill>
-                  <a:srgbClr val="0A2342"/>
+              <a:rPr sz="1200" b="1">
+                <a:solidFill>
+                  <a:srgbClr val="0B2545"/>
                 </a:solidFill>
                 <a:latin typeface="Pretendard"/>
                 <a:ea typeface="Pretendard"/>
@@ -5834,11 +5870,11 @@
           <a:p>
             <a:pPr algn="ctr">
               <a:lnSpc>
-                <a:spcPts val="1140"/>
+                <a:spcPts val="1320"/>
               </a:lnSpc>
             </a:pPr>
             <a:r>
-              <a:rPr sz="869" b="0">
+              <a:rPr sz="1019" b="0">
                 <a:solidFill>
                   <a:srgbClr val="3F4E61"/>
                 </a:solidFill>
@@ -5862,15 +5898,15 @@
         </p:nvCxnSpPr>
         <p:spPr>
           <a:xfrm>
-            <a:off x="2011680" y="1805940"/>
-            <a:ext cx="228600" cy="0"/>
+            <a:off x="2042160" y="1866900"/>
+            <a:ext cx="213360" cy="0"/>
           </a:xfrm>
           <a:prstGeom prst="line">
             <a:avLst/>
           </a:prstGeom>
           <a:ln w="16764">
             <a:solidFill>
-              <a:srgbClr val="164B8C"/>
+              <a:srgbClr val="1F4E8C"/>
             </a:solidFill>
             <a:tailEnd type="triangle" w="med" len="med"/>
           </a:ln>
@@ -5887,15 +5923,15 @@
         </p:nvCxnSpPr>
         <p:spPr>
           <a:xfrm>
-            <a:off x="2011680" y="2567940"/>
-            <a:ext cx="228600" cy="0"/>
+            <a:off x="2042160" y="2613660"/>
+            <a:ext cx="213360" cy="0"/>
           </a:xfrm>
           <a:prstGeom prst="line">
             <a:avLst/>
           </a:prstGeom>
           <a:ln w="16764">
             <a:solidFill>
-              <a:srgbClr val="164B8C"/>
+              <a:srgbClr val="1F4E8C"/>
             </a:solidFill>
             <a:tailEnd type="triangle" w="med" len="med"/>
           </a:ln>
@@ -5912,15 +5948,15 @@
         </p:nvCxnSpPr>
         <p:spPr>
           <a:xfrm>
-            <a:off x="2011680" y="3329940"/>
-            <a:ext cx="228600" cy="0"/>
+            <a:off x="2042160" y="3360420"/>
+            <a:ext cx="213360" cy="0"/>
           </a:xfrm>
           <a:prstGeom prst="line">
             <a:avLst/>
           </a:prstGeom>
           <a:ln w="16764">
             <a:solidFill>
-              <a:srgbClr val="164B8C"/>
+              <a:srgbClr val="1F4E8C"/>
             </a:solidFill>
             <a:tailEnd type="triangle" w="med" len="med"/>
           </a:ln>
@@ -5937,15 +5973,15 @@
         </p:nvCxnSpPr>
         <p:spPr>
           <a:xfrm>
-            <a:off x="2011680" y="4091940"/>
-            <a:ext cx="228600" cy="0"/>
+            <a:off x="2042160" y="4107180"/>
+            <a:ext cx="213360" cy="0"/>
           </a:xfrm>
           <a:prstGeom prst="line">
             <a:avLst/>
           </a:prstGeom>
           <a:ln w="16764">
             <a:solidFill>
-              <a:srgbClr val="164B8C"/>
+              <a:srgbClr val="1F4E8C"/>
             </a:solidFill>
             <a:tailEnd type="triangle" w="med" len="med"/>
           </a:ln>
@@ -5962,15 +5998,15 @@
         </p:nvCxnSpPr>
         <p:spPr>
           <a:xfrm>
-            <a:off x="2011680" y="4853940"/>
-            <a:ext cx="228600" cy="0"/>
+            <a:off x="2042160" y="4853940"/>
+            <a:ext cx="213360" cy="0"/>
           </a:xfrm>
           <a:prstGeom prst="line">
             <a:avLst/>
           </a:prstGeom>
           <a:ln w="16764">
             <a:solidFill>
-              <a:srgbClr val="164B8C"/>
+              <a:srgbClr val="1F4E8C"/>
             </a:solidFill>
             <a:tailEnd type="triangle" w="med" len="med"/>
           </a:ln>
@@ -5987,15 +6023,15 @@
         </p:nvCxnSpPr>
         <p:spPr>
           <a:xfrm>
-            <a:off x="5654040" y="1805940"/>
-            <a:ext cx="228600" cy="0"/>
+            <a:off x="5684520" y="1866900"/>
+            <a:ext cx="213360" cy="0"/>
           </a:xfrm>
           <a:prstGeom prst="line">
             <a:avLst/>
           </a:prstGeom>
           <a:ln w="16764">
             <a:solidFill>
-              <a:srgbClr val="164B8C"/>
+              <a:srgbClr val="1F4E8C"/>
             </a:solidFill>
             <a:tailEnd type="triangle" w="med" len="med"/>
           </a:ln>
@@ -6012,15 +6048,15 @@
         </p:nvCxnSpPr>
         <p:spPr>
           <a:xfrm>
-            <a:off x="5654040" y="2567940"/>
-            <a:ext cx="228600" cy="0"/>
+            <a:off x="5684520" y="2613660"/>
+            <a:ext cx="213360" cy="0"/>
           </a:xfrm>
           <a:prstGeom prst="line">
             <a:avLst/>
           </a:prstGeom>
           <a:ln w="16764">
             <a:solidFill>
-              <a:srgbClr val="164B8C"/>
+              <a:srgbClr val="1F4E8C"/>
             </a:solidFill>
             <a:tailEnd type="triangle" w="med" len="med"/>
           </a:ln>
@@ -6037,15 +6073,15 @@
         </p:nvCxnSpPr>
         <p:spPr>
           <a:xfrm>
-            <a:off x="5654040" y="3329940"/>
-            <a:ext cx="228600" cy="0"/>
+            <a:off x="5684520" y="3360420"/>
+            <a:ext cx="213360" cy="0"/>
           </a:xfrm>
           <a:prstGeom prst="line">
             <a:avLst/>
           </a:prstGeom>
           <a:ln w="16764">
             <a:solidFill>
-              <a:srgbClr val="164B8C"/>
+              <a:srgbClr val="1F4E8C"/>
             </a:solidFill>
             <a:tailEnd type="triangle" w="med" len="med"/>
           </a:ln>
@@ -6062,15 +6098,15 @@
         </p:nvCxnSpPr>
         <p:spPr>
           <a:xfrm>
-            <a:off x="5654040" y="4091940"/>
-            <a:ext cx="228600" cy="0"/>
+            <a:off x="5684520" y="4107180"/>
+            <a:ext cx="213360" cy="0"/>
           </a:xfrm>
           <a:prstGeom prst="line">
             <a:avLst/>
           </a:prstGeom>
           <a:ln w="16764">
             <a:solidFill>
-              <a:srgbClr val="164B8C"/>
+              <a:srgbClr val="1F4E8C"/>
             </a:solidFill>
             <a:tailEnd type="triangle" w="med" len="med"/>
           </a:ln>
@@ -6087,15 +6123,15 @@
         </p:nvCxnSpPr>
         <p:spPr>
           <a:xfrm>
-            <a:off x="5654040" y="4853940"/>
-            <a:ext cx="228600" cy="0"/>
+            <a:off x="5684520" y="4853940"/>
+            <a:ext cx="213360" cy="0"/>
           </a:xfrm>
           <a:prstGeom prst="line">
             <a:avLst/>
           </a:prstGeom>
           <a:ln w="16764">
             <a:solidFill>
-              <a:srgbClr val="164B8C"/>
+              <a:srgbClr val="1F4E8C"/>
             </a:solidFill>
             <a:tailEnd type="triangle" w="med" len="med"/>
           </a:ln>
@@ -6112,7 +6148,7 @@
         </p:nvCxnSpPr>
         <p:spPr>
           <a:xfrm>
-            <a:off x="9867900" y="2026920"/>
+            <a:off x="9867900" y="2087880"/>
             <a:ext cx="0" cy="106680"/>
           </a:xfrm>
           <a:prstGeom prst="line">
@@ -6120,7 +6156,7 @@
           </a:prstGeom>
           <a:ln w="16764">
             <a:solidFill>
-              <a:srgbClr val="164B8C"/>
+              <a:srgbClr val="1F4E8C"/>
             </a:solidFill>
             <a:tailEnd type="triangle" w="med" len="med"/>
           </a:ln>
@@ -6137,7 +6173,7 @@
         </p:nvCxnSpPr>
         <p:spPr>
           <a:xfrm>
-            <a:off x="9867900" y="2712720"/>
+            <a:off x="9867900" y="2758440"/>
             <a:ext cx="0" cy="106680"/>
           </a:xfrm>
           <a:prstGeom prst="line">
@@ -6145,7 +6181,7 @@
           </a:prstGeom>
           <a:ln w="16764">
             <a:solidFill>
-              <a:srgbClr val="164B8C"/>
+              <a:srgbClr val="1F4E8C"/>
             </a:solidFill>
             <a:tailEnd type="triangle" w="med" len="med"/>
           </a:ln>
@@ -6160,7 +6196,7 @@
         <p:spPr>
           <a:xfrm>
             <a:off x="381000" y="6309360"/>
-            <a:ext cx="3560445" cy="396240"/>
+            <a:ext cx="3821811" cy="396240"/>
           </a:xfrm>
           <a:prstGeom prst="roundRect">
             <a:avLst>
@@ -6172,7 +6208,7 @@
           </a:solidFill>
           <a:ln w="10668">
             <a:solidFill>
-              <a:srgbClr val="A9C3E2"/>
+              <a:srgbClr val="8EC3EC"/>
             </a:solidFill>
           </a:ln>
         </p:spPr>
@@ -6208,9 +6244,9 @@
           <a:p>
             <a:pPr algn="l"/>
             <a:r>
-              <a:rPr sz="900" b="1">
-                <a:solidFill>
-                  <a:srgbClr val="0A2342"/>
+              <a:rPr sz="1019" b="1">
+                <a:solidFill>
+                  <a:srgbClr val="0B2545"/>
                 </a:solidFill>
                 <a:latin typeface="Pretendard"/>
                 <a:ea typeface="Pretendard"/>
@@ -6237,7 +6273,7 @@
           </a:prstGeom>
           <a:ln w="16764">
             <a:solidFill>
-              <a:srgbClr val="164B8C"/>
+              <a:srgbClr val="1F4E8C"/>
             </a:solidFill>
             <a:tailEnd type="triangle" w="med" len="med"/>
           </a:ln>
@@ -6252,7 +6288,7 @@
         <p:spPr>
           <a:xfrm>
             <a:off x="1341120" y="6309360"/>
-            <a:ext cx="381000" cy="396240"/>
+            <a:ext cx="411480" cy="396240"/>
           </a:xfrm>
           <a:prstGeom prst="rect">
             <a:avLst/>
@@ -6267,7 +6303,7 @@
           <a:p>
             <a:pPr algn="l"/>
             <a:r>
-              <a:rPr sz="900" b="1">
+              <a:rPr sz="1019" b="1">
                 <a:solidFill>
                   <a:srgbClr val="16202C"/>
                 </a:solidFill>
@@ -6288,7 +6324,7 @@
         </p:nvSpPr>
         <p:spPr>
           <a:xfrm>
-            <a:off x="1798320" y="6438900"/>
+            <a:off x="1828800" y="6438900"/>
             <a:ext cx="182880" cy="137160"/>
           </a:xfrm>
           <a:prstGeom prst="roundRect">
@@ -6301,7 +6337,7 @@
           </a:solidFill>
           <a:ln w="7620">
             <a:solidFill>
-              <a:srgbClr val="6F9BD1"/>
+              <a:srgbClr val="8EC3EC"/>
             </a:solidFill>
           </a:ln>
         </p:spPr>
@@ -6321,8 +6357,8 @@
         </p:nvSpPr>
         <p:spPr>
           <a:xfrm>
-            <a:off x="2057400" y="6309360"/>
-            <a:ext cx="1884045" cy="396240"/>
+            <a:off x="2087880" y="6309360"/>
+            <a:ext cx="2114931" cy="396240"/>
           </a:xfrm>
           <a:prstGeom prst="rect">
             <a:avLst/>
@@ -6337,7 +6373,7 @@
           <a:p>
             <a:pPr algn="l"/>
             <a:r>
-              <a:rPr sz="900" b="1">
+              <a:rPr sz="1019" b="1">
                 <a:solidFill>
                   <a:srgbClr val="16202C"/>
                 </a:solidFill>
@@ -6358,8 +6394,8 @@
         </p:nvSpPr>
         <p:spPr>
           <a:xfrm>
-            <a:off x="6140196" y="6385560"/>
-            <a:ext cx="5670804" cy="167640"/>
+            <a:off x="4990338" y="6347460"/>
+            <a:ext cx="6820662" cy="190500"/>
           </a:xfrm>
           <a:prstGeom prst="rect">
             <a:avLst/>
@@ -6374,7 +6410,7 @@
           <a:p>
             <a:pPr algn="r"/>
             <a:r>
-              <a:rPr sz="840" b="0">
+              <a:rPr sz="1019" b="0">
                 <a:solidFill>
                   <a:srgbClr val="3F4E61"/>
                 </a:solidFill>
@@ -6395,8 +6431,8 @@
         </p:nvSpPr>
         <p:spPr>
           <a:xfrm>
-            <a:off x="6758940" y="6553200"/>
-            <a:ext cx="5052060" cy="167640"/>
+            <a:off x="5741670" y="6537960"/>
+            <a:ext cx="6069330" cy="190500"/>
           </a:xfrm>
           <a:prstGeom prst="rect">
             <a:avLst/>
@@ -6411,7 +6447,7 @@
           <a:p>
             <a:pPr algn="r"/>
             <a:r>
-              <a:rPr sz="840" b="0">
+              <a:rPr sz="1019" b="0">
                 <a:solidFill>
                   <a:srgbClr val="3F4E61"/>
                 </a:solidFill>

--- a/docs/design/dist/d07-type-mapping.pptx
+++ b/docs/design/dist/d07-type-mapping.pptx
@@ -3113,7 +3113,7 @@
             </a:avLst>
           </a:prstGeom>
           <a:solidFill>
-            <a:srgbClr val="1F4E8C"/>
+            <a:srgbClr val="1E6B4F"/>
           </a:solidFill>
           <a:ln>
             <a:noFill/>
@@ -3153,7 +3153,7 @@
             <a:r>
               <a:rPr sz="2160" b="1">
                 <a:solidFill>
-                  <a:srgbClr val="0B2545"/>
+                  <a:srgbClr val="0B3D2E"/>
                 </a:solidFill>
                 <a:latin typeface="Pretendard"/>
                 <a:ea typeface="Pretendard"/>
@@ -3255,11 +3255,11 @@
             </a:avLst>
           </a:prstGeom>
           <a:solidFill>
-            <a:srgbClr val="EEF6FD"/>
+            <a:srgbClr val="EEF8F3"/>
           </a:solidFill>
           <a:ln w="10668">
             <a:solidFill>
-              <a:srgbClr val="8EC3EC"/>
+              <a:srgbClr val="9DD3B8"/>
             </a:solidFill>
           </a:ln>
         </p:spPr>
@@ -3277,7 +3277,7 @@
             <a:r>
               <a:rPr sz="1200" b="1">
                 <a:solidFill>
-                  <a:srgbClr val="0B2545"/>
+                  <a:srgbClr val="0B3D2E"/>
                 </a:solidFill>
                 <a:latin typeface="Pretendard"/>
                 <a:ea typeface="Pretendard"/>
@@ -3323,11 +3323,11 @@
             </a:avLst>
           </a:prstGeom>
           <a:solidFill>
-            <a:srgbClr val="EEF6FD"/>
+            <a:srgbClr val="EEF8F3"/>
           </a:solidFill>
           <a:ln w="10668">
             <a:solidFill>
-              <a:srgbClr val="8EC3EC"/>
+              <a:srgbClr val="9DD3B8"/>
             </a:solidFill>
           </a:ln>
         </p:spPr>
@@ -3345,7 +3345,7 @@
             <a:r>
               <a:rPr sz="1200" b="1">
                 <a:solidFill>
-                  <a:srgbClr val="0B2545"/>
+                  <a:srgbClr val="0B3D2E"/>
                 </a:solidFill>
                 <a:latin typeface="Pretendard"/>
                 <a:ea typeface="Pretendard"/>
@@ -3391,11 +3391,11 @@
             </a:avLst>
           </a:prstGeom>
           <a:solidFill>
-            <a:srgbClr val="EEF6FD"/>
+            <a:srgbClr val="EEF8F3"/>
           </a:solidFill>
           <a:ln w="10668">
             <a:solidFill>
-              <a:srgbClr val="8EC3EC"/>
+              <a:srgbClr val="9DD3B8"/>
             </a:solidFill>
           </a:ln>
         </p:spPr>
@@ -3413,7 +3413,7 @@
             <a:r>
               <a:rPr sz="1200" b="1">
                 <a:solidFill>
-                  <a:srgbClr val="0B2545"/>
+                  <a:srgbClr val="0B3D2E"/>
                 </a:solidFill>
                 <a:latin typeface="Pretendard"/>
                 <a:ea typeface="Pretendard"/>
@@ -3463,7 +3463,7 @@
           </a:solidFill>
           <a:ln w="13716">
             <a:solidFill>
-              <a:srgbClr val="8EC3EC"/>
+              <a:srgbClr val="9DD3B8"/>
             </a:solidFill>
           </a:ln>
         </p:spPr>
@@ -3481,7 +3481,7 @@
             <a:r>
               <a:rPr sz="1200" b="1">
                 <a:solidFill>
-                  <a:srgbClr val="0B2545"/>
+                  <a:srgbClr val="0B3D2E"/>
                 </a:solidFill>
                 <a:latin typeface="Pretendard"/>
                 <a:ea typeface="Pretendard"/>
@@ -3531,7 +3531,7 @@
           </a:solidFill>
           <a:ln w="13716">
             <a:solidFill>
-              <a:srgbClr val="8EC3EC"/>
+              <a:srgbClr val="9DD3B8"/>
             </a:solidFill>
           </a:ln>
         </p:spPr>
@@ -3549,7 +3549,7 @@
             <a:r>
               <a:rPr sz="1200" b="1">
                 <a:solidFill>
-                  <a:srgbClr val="0B2545"/>
+                  <a:srgbClr val="0B3D2E"/>
                 </a:solidFill>
                 <a:latin typeface="Pretendard"/>
                 <a:ea typeface="Pretendard"/>
@@ -3599,7 +3599,7 @@
           </a:solidFill>
           <a:ln w="13716">
             <a:solidFill>
-              <a:srgbClr val="8EC3EC"/>
+              <a:srgbClr val="9DD3B8"/>
             </a:solidFill>
           </a:ln>
         </p:spPr>
@@ -3617,7 +3617,7 @@
             <a:r>
               <a:rPr sz="1200" b="1">
                 <a:solidFill>
-                  <a:srgbClr val="0B2545"/>
+                  <a:srgbClr val="0B3D2E"/>
                 </a:solidFill>
                 <a:latin typeface="Pretendard"/>
                 <a:ea typeface="Pretendard"/>
@@ -3667,7 +3667,7 @@
           </a:solidFill>
           <a:ln w="13716">
             <a:solidFill>
-              <a:srgbClr val="8EC3EC"/>
+              <a:srgbClr val="9DD3B8"/>
             </a:solidFill>
           </a:ln>
         </p:spPr>
@@ -3685,7 +3685,7 @@
             <a:r>
               <a:rPr sz="1200" b="1">
                 <a:solidFill>
-                  <a:srgbClr val="0B2545"/>
+                  <a:srgbClr val="0B3D2E"/>
                 </a:solidFill>
                 <a:latin typeface="Pretendard"/>
                 <a:ea typeface="Pretendard"/>
@@ -3735,7 +3735,7 @@
           </a:solidFill>
           <a:ln w="13716">
             <a:solidFill>
-              <a:srgbClr val="8EC3EC"/>
+              <a:srgbClr val="9DD3B8"/>
             </a:solidFill>
           </a:ln>
         </p:spPr>
@@ -3753,7 +3753,7 @@
             <a:r>
               <a:rPr sz="1200" b="1">
                 <a:solidFill>
-                  <a:srgbClr val="0B2545"/>
+                  <a:srgbClr val="0B3D2E"/>
                 </a:solidFill>
                 <a:latin typeface="Pretendard"/>
                 <a:ea typeface="Pretendard"/>
@@ -3803,7 +3803,7 @@
           </a:solidFill>
           <a:ln w="13716">
             <a:solidFill>
-              <a:srgbClr val="8EC3EC"/>
+              <a:srgbClr val="9DD3B8"/>
             </a:solidFill>
           </a:ln>
         </p:spPr>
@@ -3821,7 +3821,7 @@
             <a:r>
               <a:rPr sz="1200" b="1">
                 <a:solidFill>
-                  <a:srgbClr val="0B2545"/>
+                  <a:srgbClr val="0B3D2E"/>
                 </a:solidFill>
                 <a:latin typeface="Pretendard"/>
                 <a:ea typeface="Pretendard"/>
@@ -3871,7 +3871,7 @@
           </a:solidFill>
           <a:ln w="13716">
             <a:solidFill>
-              <a:srgbClr val="8EC3EC"/>
+              <a:srgbClr val="9DD3B8"/>
             </a:solidFill>
           </a:ln>
         </p:spPr>
@@ -3889,7 +3889,7 @@
             <a:r>
               <a:rPr sz="1200" b="1">
                 <a:solidFill>
-                  <a:srgbClr val="0B2545"/>
+                  <a:srgbClr val="0B3D2E"/>
                 </a:solidFill>
                 <a:latin typeface="Pretendard"/>
                 <a:ea typeface="Pretendard"/>
@@ -3939,7 +3939,7 @@
           </a:solidFill>
           <a:ln w="13716">
             <a:solidFill>
-              <a:srgbClr val="8EC3EC"/>
+              <a:srgbClr val="9DD3B8"/>
             </a:solidFill>
           </a:ln>
         </p:spPr>
@@ -3957,7 +3957,7 @@
             <a:r>
               <a:rPr sz="1200" b="1">
                 <a:solidFill>
-                  <a:srgbClr val="0B2545"/>
+                  <a:srgbClr val="0B3D2E"/>
                 </a:solidFill>
                 <a:latin typeface="Pretendard"/>
                 <a:ea typeface="Pretendard"/>
@@ -4007,7 +4007,7 @@
           </a:solidFill>
           <a:ln w="13716">
             <a:solidFill>
-              <a:srgbClr val="8EC3EC"/>
+              <a:srgbClr val="9DD3B8"/>
             </a:solidFill>
           </a:ln>
         </p:spPr>
@@ -4025,7 +4025,7 @@
             <a:r>
               <a:rPr sz="1200" b="1">
                 <a:solidFill>
-                  <a:srgbClr val="0B2545"/>
+                  <a:srgbClr val="0B3D2E"/>
                 </a:solidFill>
                 <a:latin typeface="Pretendard"/>
                 <a:ea typeface="Pretendard"/>
@@ -4075,7 +4075,7 @@
           </a:solidFill>
           <a:ln w="13716">
             <a:solidFill>
-              <a:srgbClr val="8EC3EC"/>
+              <a:srgbClr val="9DD3B8"/>
             </a:solidFill>
           </a:ln>
         </p:spPr>
@@ -4093,7 +4093,7 @@
             <a:r>
               <a:rPr sz="1200" b="1">
                 <a:solidFill>
-                  <a:srgbClr val="0B2545"/>
+                  <a:srgbClr val="0B3D2E"/>
                 </a:solidFill>
                 <a:latin typeface="Pretendard"/>
                 <a:ea typeface="Pretendard"/>
@@ -4143,7 +4143,7 @@
           </a:solidFill>
           <a:ln w="13716">
             <a:solidFill>
-              <a:srgbClr val="8EC3EC"/>
+              <a:srgbClr val="9DD3B8"/>
             </a:solidFill>
           </a:ln>
         </p:spPr>
@@ -4161,7 +4161,7 @@
             <a:r>
               <a:rPr sz="1200" b="1">
                 <a:solidFill>
-                  <a:srgbClr val="0B2545"/>
+                  <a:srgbClr val="0B3D2E"/>
                 </a:solidFill>
                 <a:latin typeface="Pretendard"/>
                 <a:ea typeface="Pretendard"/>
@@ -4211,7 +4211,7 @@
           </a:solidFill>
           <a:ln w="13716">
             <a:solidFill>
-              <a:srgbClr val="8EC3EC"/>
+              <a:srgbClr val="9DD3B8"/>
             </a:solidFill>
           </a:ln>
         </p:spPr>
@@ -4229,7 +4229,7 @@
             <a:r>
               <a:rPr sz="1200" b="1">
                 <a:solidFill>
-                  <a:srgbClr val="0B2545"/>
+                  <a:srgbClr val="0B3D2E"/>
                 </a:solidFill>
                 <a:latin typeface="Pretendard"/>
                 <a:ea typeface="Pretendard"/>
@@ -4279,7 +4279,7 @@
           </a:solidFill>
           <a:ln w="13716">
             <a:solidFill>
-              <a:srgbClr val="8EC3EC"/>
+              <a:srgbClr val="9DD3B8"/>
             </a:solidFill>
           </a:ln>
         </p:spPr>
@@ -4297,7 +4297,7 @@
             <a:r>
               <a:rPr sz="1200" b="1">
                 <a:solidFill>
-                  <a:srgbClr val="0B2545"/>
+                  <a:srgbClr val="0B3D2E"/>
                 </a:solidFill>
                 <a:latin typeface="Pretendard"/>
                 <a:ea typeface="Pretendard"/>
@@ -4347,7 +4347,7 @@
           </a:solidFill>
           <a:ln w="13716">
             <a:solidFill>
-              <a:srgbClr val="8EC3EC"/>
+              <a:srgbClr val="9DD3B8"/>
             </a:solidFill>
           </a:ln>
         </p:spPr>
@@ -4365,7 +4365,7 @@
             <a:r>
               <a:rPr sz="1200" b="1">
                 <a:solidFill>
-                  <a:srgbClr val="0B2545"/>
+                  <a:srgbClr val="0B3D2E"/>
                 </a:solidFill>
                 <a:latin typeface="Pretendard"/>
                 <a:ea typeface="Pretendard"/>
@@ -4415,7 +4415,7 @@
           </a:solidFill>
           <a:ln w="13716">
             <a:solidFill>
-              <a:srgbClr val="8EC3EC"/>
+              <a:srgbClr val="9DD3B8"/>
             </a:solidFill>
           </a:ln>
         </p:spPr>
@@ -4433,7 +4433,7 @@
             <a:r>
               <a:rPr sz="1200" b="1">
                 <a:solidFill>
-                  <a:srgbClr val="0B2545"/>
+                  <a:srgbClr val="0B3D2E"/>
                 </a:solidFill>
                 <a:latin typeface="Pretendard"/>
                 <a:ea typeface="Pretendard"/>
@@ -4479,11 +4479,11 @@
             </a:avLst>
           </a:prstGeom>
           <a:solidFill>
-            <a:srgbClr val="D3E5F8"/>
+            <a:srgbClr val="D5EFE2"/>
           </a:solidFill>
           <a:ln w="16764">
             <a:solidFill>
-              <a:srgbClr val="1F4E8C"/>
+              <a:srgbClr val="1E6B4F"/>
             </a:solidFill>
           </a:ln>
         </p:spPr>
@@ -4501,7 +4501,7 @@
             <a:r>
               <a:rPr sz="1200" b="1">
                 <a:solidFill>
-                  <a:srgbClr val="0B2545"/>
+                  <a:srgbClr val="0B3D2E"/>
                 </a:solidFill>
                 <a:latin typeface="Pretendard"/>
                 <a:ea typeface="Pretendard"/>
@@ -4551,7 +4551,7 @@
           </a:solidFill>
           <a:ln w="13716">
             <a:solidFill>
-              <a:srgbClr val="8EC3EC"/>
+              <a:srgbClr val="9DD3B8"/>
             </a:solidFill>
           </a:ln>
         </p:spPr>
@@ -4569,7 +4569,7 @@
             <a:r>
               <a:rPr sz="1200" b="1">
                 <a:solidFill>
-                  <a:srgbClr val="0B2545"/>
+                  <a:srgbClr val="0B3D2E"/>
                 </a:solidFill>
                 <a:latin typeface="Pretendard"/>
                 <a:ea typeface="Pretendard"/>
@@ -4615,11 +4615,11 @@
             </a:avLst>
           </a:prstGeom>
           <a:solidFill>
-            <a:srgbClr val="D3E5F8"/>
+            <a:srgbClr val="D5EFE2"/>
           </a:solidFill>
           <a:ln w="16764">
             <a:solidFill>
-              <a:srgbClr val="1F4E8C"/>
+              <a:srgbClr val="1E6B4F"/>
             </a:solidFill>
           </a:ln>
         </p:spPr>
@@ -4637,7 +4637,7 @@
             <a:r>
               <a:rPr sz="1200" b="1">
                 <a:solidFill>
-                  <a:srgbClr val="0B2545"/>
+                  <a:srgbClr val="0B3D2E"/>
                 </a:solidFill>
                 <a:latin typeface="Pretendard"/>
                 <a:ea typeface="Pretendard"/>
@@ -4687,7 +4687,7 @@
           </a:solidFill>
           <a:ln w="13716">
             <a:solidFill>
-              <a:srgbClr val="8EC3EC"/>
+              <a:srgbClr val="9DD3B8"/>
             </a:solidFill>
           </a:ln>
         </p:spPr>
@@ -4705,7 +4705,7 @@
             <a:r>
               <a:rPr sz="1200" b="1">
                 <a:solidFill>
-                  <a:srgbClr val="0B2545"/>
+                  <a:srgbClr val="0B3D2E"/>
                 </a:solidFill>
                 <a:latin typeface="Pretendard"/>
                 <a:ea typeface="Pretendard"/>
@@ -4751,11 +4751,11 @@
             </a:avLst>
           </a:prstGeom>
           <a:solidFill>
-            <a:srgbClr val="D3E5F8"/>
+            <a:srgbClr val="D5EFE2"/>
           </a:solidFill>
           <a:ln w="16764">
             <a:solidFill>
-              <a:srgbClr val="1F4E8C"/>
+              <a:srgbClr val="1E6B4F"/>
             </a:solidFill>
           </a:ln>
         </p:spPr>
@@ -4773,7 +4773,7 @@
             <a:r>
               <a:rPr sz="1200" b="1">
                 <a:solidFill>
-                  <a:srgbClr val="0B2545"/>
+                  <a:srgbClr val="0B3D2E"/>
                 </a:solidFill>
                 <a:latin typeface="Pretendard"/>
                 <a:ea typeface="Pretendard"/>
@@ -4823,7 +4823,7 @@
           </a:solidFill>
           <a:ln w="15240">
             <a:solidFill>
-              <a:srgbClr val="1F4E8C"/>
+              <a:srgbClr val="1E6B4F"/>
             </a:solidFill>
           </a:ln>
         </p:spPr>
@@ -4837,7 +4837,7 @@
             <a:r>
               <a:rPr sz="1080" b="1">
                 <a:solidFill>
-                  <a:srgbClr val="0B2545"/>
+                  <a:srgbClr val="0B3D2E"/>
                 </a:solidFill>
                 <a:latin typeface="Pretendard"/>
                 <a:ea typeface="Pretendard"/>
@@ -5235,7 +5235,7 @@
             </a:pathLst>
           </a:custGeom>
           <a:solidFill>
-            <a:srgbClr val="1F4E8C"/>
+            <a:srgbClr val="1E6B4F"/>
           </a:solidFill>
           <a:ln>
             <a:noFill/>
@@ -5270,7 +5270,7 @@
           </a:solidFill>
           <a:ln w="13716">
             <a:solidFill>
-              <a:srgbClr val="8EC3EC"/>
+              <a:srgbClr val="9DD3B8"/>
             </a:solidFill>
           </a:ln>
         </p:spPr>
@@ -5288,7 +5288,7 @@
             <a:r>
               <a:rPr sz="1200" b="1">
                 <a:solidFill>
-                  <a:srgbClr val="0B2545"/>
+                  <a:srgbClr val="0B3D2E"/>
                 </a:solidFill>
                 <a:latin typeface="Pretendard"/>
                 <a:ea typeface="Pretendard"/>
@@ -5332,7 +5332,7 @@
             <a:avLst/>
           </a:prstGeom>
           <a:solidFill>
-            <a:srgbClr val="1F4E8C"/>
+            <a:srgbClr val="1E6B4F"/>
           </a:solidFill>
           <a:ln>
             <a:noFill/>
@@ -5380,7 +5380,7 @@
           </a:solidFill>
           <a:ln w="13716">
             <a:solidFill>
-              <a:srgbClr val="8EC3EC"/>
+              <a:srgbClr val="9DD3B8"/>
             </a:solidFill>
           </a:ln>
         </p:spPr>
@@ -5398,7 +5398,7 @@
             <a:r>
               <a:rPr sz="1200" b="1">
                 <a:solidFill>
-                  <a:srgbClr val="0B2545"/>
+                  <a:srgbClr val="0B3D2E"/>
                 </a:solidFill>
                 <a:latin typeface="Pretendard"/>
                 <a:ea typeface="Pretendard"/>
@@ -5442,7 +5442,7 @@
             <a:avLst/>
           </a:prstGeom>
           <a:solidFill>
-            <a:srgbClr val="1F4E8C"/>
+            <a:srgbClr val="1E6B4F"/>
           </a:solidFill>
           <a:ln>
             <a:noFill/>
@@ -5490,7 +5490,7 @@
           </a:solidFill>
           <a:ln w="13716">
             <a:solidFill>
-              <a:srgbClr val="8EC3EC"/>
+              <a:srgbClr val="9DD3B8"/>
             </a:solidFill>
           </a:ln>
         </p:spPr>
@@ -5508,7 +5508,7 @@
             <a:r>
               <a:rPr sz="1200" b="1">
                 <a:solidFill>
-                  <a:srgbClr val="0B2545"/>
+                  <a:srgbClr val="0B3D2E"/>
                 </a:solidFill>
                 <a:latin typeface="Pretendard"/>
                 <a:ea typeface="Pretendard"/>
@@ -5552,7 +5552,7 @@
             <a:avLst/>
           </a:prstGeom>
           <a:solidFill>
-            <a:srgbClr val="1F4E8C"/>
+            <a:srgbClr val="1E6B4F"/>
           </a:solidFill>
           <a:ln>
             <a:noFill/>
@@ -5600,7 +5600,7 @@
           </a:solidFill>
           <a:ln w="13716">
             <a:solidFill>
-              <a:srgbClr val="8EC3EC"/>
+              <a:srgbClr val="9DD3B8"/>
             </a:solidFill>
           </a:ln>
         </p:spPr>
@@ -5618,7 +5618,7 @@
             <a:r>
               <a:rPr sz="1200" b="1">
                 <a:solidFill>
-                  <a:srgbClr val="0B2545"/>
+                  <a:srgbClr val="0B3D2E"/>
                 </a:solidFill>
                 <a:latin typeface="Pretendard"/>
                 <a:ea typeface="Pretendard"/>
@@ -5668,7 +5668,7 @@
           </a:solidFill>
           <a:ln w="13716">
             <a:solidFill>
-              <a:srgbClr val="8EC3EC"/>
+              <a:srgbClr val="9DD3B8"/>
             </a:solidFill>
           </a:ln>
         </p:spPr>
@@ -5686,7 +5686,7 @@
             <a:r>
               <a:rPr sz="1200" b="1">
                 <a:solidFill>
-                  <a:srgbClr val="0B2545"/>
+                  <a:srgbClr val="0B3D2E"/>
                 </a:solidFill>
                 <a:latin typeface="Pretendard"/>
                 <a:ea typeface="Pretendard"/>
@@ -5754,7 +5754,7 @@
           </a:solidFill>
           <a:ln w="13716">
             <a:solidFill>
-              <a:srgbClr val="8EC3EC"/>
+              <a:srgbClr val="9DD3B8"/>
             </a:solidFill>
           </a:ln>
         </p:spPr>
@@ -5772,7 +5772,7 @@
             <a:r>
               <a:rPr sz="1200" b="1">
                 <a:solidFill>
-                  <a:srgbClr val="0B2545"/>
+                  <a:srgbClr val="0B3D2E"/>
                 </a:solidFill>
                 <a:latin typeface="Pretendard"/>
                 <a:ea typeface="Pretendard"/>
@@ -5840,7 +5840,7 @@
           </a:solidFill>
           <a:ln w="13716">
             <a:solidFill>
-              <a:srgbClr val="8EC3EC"/>
+              <a:srgbClr val="9DD3B8"/>
             </a:solidFill>
           </a:ln>
         </p:spPr>
@@ -5858,7 +5858,7 @@
             <a:r>
               <a:rPr sz="1200" b="1">
                 <a:solidFill>
-                  <a:srgbClr val="0B2545"/>
+                  <a:srgbClr val="0B3D2E"/>
                 </a:solidFill>
                 <a:latin typeface="Pretendard"/>
                 <a:ea typeface="Pretendard"/>
@@ -5906,7 +5906,7 @@
           </a:prstGeom>
           <a:ln w="16764">
             <a:solidFill>
-              <a:srgbClr val="1F4E8C"/>
+              <a:srgbClr val="1E6B4F"/>
             </a:solidFill>
             <a:tailEnd type="triangle" w="med" len="med"/>
           </a:ln>
@@ -5931,7 +5931,7 @@
           </a:prstGeom>
           <a:ln w="16764">
             <a:solidFill>
-              <a:srgbClr val="1F4E8C"/>
+              <a:srgbClr val="1E6B4F"/>
             </a:solidFill>
             <a:tailEnd type="triangle" w="med" len="med"/>
           </a:ln>
@@ -5956,7 +5956,7 @@
           </a:prstGeom>
           <a:ln w="16764">
             <a:solidFill>
-              <a:srgbClr val="1F4E8C"/>
+              <a:srgbClr val="1E6B4F"/>
             </a:solidFill>
             <a:tailEnd type="triangle" w="med" len="med"/>
           </a:ln>
@@ -5981,7 +5981,7 @@
           </a:prstGeom>
           <a:ln w="16764">
             <a:solidFill>
-              <a:srgbClr val="1F4E8C"/>
+              <a:srgbClr val="1E6B4F"/>
             </a:solidFill>
             <a:tailEnd type="triangle" w="med" len="med"/>
           </a:ln>
@@ -6006,7 +6006,7 @@
           </a:prstGeom>
           <a:ln w="16764">
             <a:solidFill>
-              <a:srgbClr val="1F4E8C"/>
+              <a:srgbClr val="1E6B4F"/>
             </a:solidFill>
             <a:tailEnd type="triangle" w="med" len="med"/>
           </a:ln>
@@ -6031,7 +6031,7 @@
           </a:prstGeom>
           <a:ln w="16764">
             <a:solidFill>
-              <a:srgbClr val="1F4E8C"/>
+              <a:srgbClr val="1E6B4F"/>
             </a:solidFill>
             <a:tailEnd type="triangle" w="med" len="med"/>
           </a:ln>
@@ -6056,7 +6056,7 @@
           </a:prstGeom>
           <a:ln w="16764">
             <a:solidFill>
-              <a:srgbClr val="1F4E8C"/>
+              <a:srgbClr val="1E6B4F"/>
             </a:solidFill>
             <a:tailEnd type="triangle" w="med" len="med"/>
           </a:ln>
@@ -6081,7 +6081,7 @@
           </a:prstGeom>
           <a:ln w="16764">
             <a:solidFill>
-              <a:srgbClr val="1F4E8C"/>
+              <a:srgbClr val="1E6B4F"/>
             </a:solidFill>
             <a:tailEnd type="triangle" w="med" len="med"/>
           </a:ln>
@@ -6106,7 +6106,7 @@
           </a:prstGeom>
           <a:ln w="16764">
             <a:solidFill>
-              <a:srgbClr val="1F4E8C"/>
+              <a:srgbClr val="1E6B4F"/>
             </a:solidFill>
             <a:tailEnd type="triangle" w="med" len="med"/>
           </a:ln>
@@ -6131,7 +6131,7 @@
           </a:prstGeom>
           <a:ln w="16764">
             <a:solidFill>
-              <a:srgbClr val="1F4E8C"/>
+              <a:srgbClr val="1E6B4F"/>
             </a:solidFill>
             <a:tailEnd type="triangle" w="med" len="med"/>
           </a:ln>
@@ -6156,7 +6156,7 @@
           </a:prstGeom>
           <a:ln w="16764">
             <a:solidFill>
-              <a:srgbClr val="1F4E8C"/>
+              <a:srgbClr val="1E6B4F"/>
             </a:solidFill>
             <a:tailEnd type="triangle" w="med" len="med"/>
           </a:ln>
@@ -6181,7 +6181,7 @@
           </a:prstGeom>
           <a:ln w="16764">
             <a:solidFill>
-              <a:srgbClr val="1F4E8C"/>
+              <a:srgbClr val="1E6B4F"/>
             </a:solidFill>
             <a:tailEnd type="triangle" w="med" len="med"/>
           </a:ln>
@@ -6208,7 +6208,7 @@
           </a:solidFill>
           <a:ln w="10668">
             <a:solidFill>
-              <a:srgbClr val="8EC3EC"/>
+              <a:srgbClr val="9DD3B8"/>
             </a:solidFill>
           </a:ln>
         </p:spPr>
@@ -6246,7 +6246,7 @@
             <a:r>
               <a:rPr sz="1019" b="1">
                 <a:solidFill>
-                  <a:srgbClr val="0B2545"/>
+                  <a:srgbClr val="0B3D2E"/>
                 </a:solidFill>
                 <a:latin typeface="Pretendard"/>
                 <a:ea typeface="Pretendard"/>
@@ -6273,7 +6273,7 @@
           </a:prstGeom>
           <a:ln w="16764">
             <a:solidFill>
-              <a:srgbClr val="1F4E8C"/>
+              <a:srgbClr val="1E6B4F"/>
             </a:solidFill>
             <a:tailEnd type="triangle" w="med" len="med"/>
           </a:ln>
@@ -6333,11 +6333,11 @@
             </a:avLst>
           </a:prstGeom>
           <a:solidFill>
-            <a:srgbClr val="D3E5F8"/>
+            <a:srgbClr val="D5EFE2"/>
           </a:solidFill>
           <a:ln w="7620">
             <a:solidFill>
-              <a:srgbClr val="8EC3EC"/>
+              <a:srgbClr val="9DD3B8"/>
             </a:solidFill>
           </a:ln>
         </p:spPr>
